--- a/pbl2_2427030210_presentation.pptx
+++ b/pbl2_2427030210_presentation.pptx
@@ -9,18 +9,16 @@
     <p:sldId id="257" r:id="rId3"/>
     <p:sldId id="258" r:id="rId4"/>
     <p:sldId id="259" r:id="rId5"/>
-    <p:sldId id="260" r:id="rId6"/>
-    <p:sldId id="267" r:id="rId7"/>
-    <p:sldId id="261" r:id="rId8"/>
-    <p:sldId id="262" r:id="rId9"/>
-    <p:sldId id="266" r:id="rId10"/>
-    <p:sldId id="263" r:id="rId11"/>
-    <p:sldId id="269" r:id="rId12"/>
-    <p:sldId id="270" r:id="rId13"/>
-    <p:sldId id="271" r:id="rId14"/>
-    <p:sldId id="272" r:id="rId15"/>
-    <p:sldId id="264" r:id="rId16"/>
-    <p:sldId id="265" r:id="rId17"/>
+    <p:sldId id="261" r:id="rId6"/>
+    <p:sldId id="262" r:id="rId7"/>
+    <p:sldId id="266" r:id="rId8"/>
+    <p:sldId id="260" r:id="rId9"/>
+    <p:sldId id="267" r:id="rId10"/>
+    <p:sldId id="271" r:id="rId11"/>
+    <p:sldId id="272" r:id="rId12"/>
+    <p:sldId id="273" r:id="rId13"/>
+    <p:sldId id="264" r:id="rId14"/>
+    <p:sldId id="265" r:id="rId15"/>
   </p:sldIdLst>
   <p:sldSz cx="9144000" cy="6858000" type="screen4x3"/>
   <p:notesSz cx="6858000" cy="9144000"/>
@@ -141,7 +139,7 @@
 <file path=ppt/revisionInfo.xml><?xml version="1.0" encoding="utf-8"?>
 <p1510:revInfo xmlns:a="http://schemas.openxmlformats.org/drawingml/2006/main" xmlns:r="http://schemas.openxmlformats.org/officeDocument/2006/relationships" xmlns:p1510="http://schemas.microsoft.com/office/powerpoint/2015/10/main">
   <p1510:revLst>
-    <p1510:client id="{AAD5DC6C-614B-4A8E-9617-8C6EB8180231}" v="15" dt="2025-10-12T20:31:49.901"/>
+    <p1510:client id="{FD4BDD12-89E2-4F3B-8F16-57B29CC0E75D}" v="7" dt="2026-04-12T09:06:52.918"/>
   </p1510:revLst>
 </p1510:revInfo>
 </file>
@@ -477,7 +475,7 @@
           <a:p>
             <a:fld id="{5BCAD085-E8A6-8845-BD4E-CB4CCA059FC4}" type="datetimeFigureOut">
               <a:rPr lang="en-US" smtClean="0"/>
-              <a:t>2/15/2026</a:t>
+              <a:t>4/12/2026</a:t>
             </a:fld>
             <a:endParaRPr lang="en-US"/>
           </a:p>
@@ -801,7 +799,7 @@
           <a:p>
             <a:fld id="{5BCAD085-E8A6-8845-BD4E-CB4CCA059FC4}" type="datetimeFigureOut">
               <a:rPr lang="en-US" smtClean="0"/>
-              <a:t>2/15/2026</a:t>
+              <a:t>4/12/2026</a:t>
             </a:fld>
             <a:endParaRPr lang="en-US"/>
           </a:p>
@@ -1049,7 +1047,7 @@
           <a:p>
             <a:fld id="{5BCAD085-E8A6-8845-BD4E-CB4CCA059FC4}" type="datetimeFigureOut">
               <a:rPr lang="en-US" smtClean="0"/>
-              <a:t>2/15/2026</a:t>
+              <a:t>4/12/2026</a:t>
             </a:fld>
             <a:endParaRPr lang="en-US"/>
           </a:p>
@@ -1388,7 +1386,7 @@
           <a:p>
             <a:fld id="{5BCAD085-E8A6-8845-BD4E-CB4CCA059FC4}" type="datetimeFigureOut">
               <a:rPr lang="en-US" smtClean="0"/>
-              <a:t>2/15/2026</a:t>
+              <a:t>4/12/2026</a:t>
             </a:fld>
             <a:endParaRPr lang="en-US"/>
           </a:p>
@@ -1735,7 +1733,7 @@
           <a:p>
             <a:fld id="{5BCAD085-E8A6-8845-BD4E-CB4CCA059FC4}" type="datetimeFigureOut">
               <a:rPr lang="en-US" smtClean="0"/>
-              <a:t>2/15/2026</a:t>
+              <a:t>4/12/2026</a:t>
             </a:fld>
             <a:endParaRPr lang="en-US"/>
           </a:p>
@@ -2109,7 +2107,7 @@
           <a:p>
             <a:fld id="{5BCAD085-E8A6-8845-BD4E-CB4CCA059FC4}" type="datetimeFigureOut">
               <a:rPr lang="en-US" smtClean="0"/>
-              <a:t>2/15/2026</a:t>
+              <a:t>4/12/2026</a:t>
             </a:fld>
             <a:endParaRPr lang="en-US"/>
           </a:p>
@@ -2579,7 +2577,7 @@
           <a:p>
             <a:fld id="{5BCAD085-E8A6-8845-BD4E-CB4CCA059FC4}" type="datetimeFigureOut">
               <a:rPr lang="en-US" smtClean="0"/>
-              <a:t>2/15/2026</a:t>
+              <a:t>4/12/2026</a:t>
             </a:fld>
             <a:endParaRPr lang="en-US"/>
           </a:p>
@@ -2789,7 +2787,7 @@
           <a:p>
             <a:fld id="{5BCAD085-E8A6-8845-BD4E-CB4CCA059FC4}" type="datetimeFigureOut">
               <a:rPr lang="en-US" smtClean="0"/>
-              <a:t>2/15/2026</a:t>
+              <a:t>4/12/2026</a:t>
             </a:fld>
             <a:endParaRPr lang="en-US"/>
           </a:p>
@@ -3000,7 +2998,7 @@
           <a:p>
             <a:fld id="{5BCAD085-E8A6-8845-BD4E-CB4CCA059FC4}" type="datetimeFigureOut">
               <a:rPr lang="en-US" smtClean="0"/>
-              <a:t>2/15/2026</a:t>
+              <a:t>4/12/2026</a:t>
             </a:fld>
             <a:endParaRPr lang="en-US"/>
           </a:p>
@@ -3232,7 +3230,7 @@
           <a:p>
             <a:fld id="{5BCAD085-E8A6-8845-BD4E-CB4CCA059FC4}" type="datetimeFigureOut">
               <a:rPr lang="en-US" smtClean="0"/>
-              <a:t>2/15/2026</a:t>
+              <a:t>4/12/2026</a:t>
             </a:fld>
             <a:endParaRPr lang="en-US"/>
           </a:p>
@@ -3480,7 +3478,7 @@
           <a:p>
             <a:fld id="{5BCAD085-E8A6-8845-BD4E-CB4CCA059FC4}" type="datetimeFigureOut">
               <a:rPr lang="en-US" smtClean="0"/>
-              <a:t>2/15/2026</a:t>
+              <a:t>4/12/2026</a:t>
             </a:fld>
             <a:endParaRPr lang="en-US"/>
           </a:p>
@@ -3783,7 +3781,7 @@
           <a:p>
             <a:fld id="{5BCAD085-E8A6-8845-BD4E-CB4CCA059FC4}" type="datetimeFigureOut">
               <a:rPr lang="en-US" smtClean="0"/>
-              <a:t>2/15/2026</a:t>
+              <a:t>4/12/2026</a:t>
             </a:fld>
             <a:endParaRPr lang="en-US"/>
           </a:p>
@@ -4165,7 +4163,7 @@
           <a:p>
             <a:fld id="{5BCAD085-E8A6-8845-BD4E-CB4CCA059FC4}" type="datetimeFigureOut">
               <a:rPr lang="en-US" smtClean="0"/>
-              <a:t>2/15/2026</a:t>
+              <a:t>4/12/2026</a:t>
             </a:fld>
             <a:endParaRPr lang="en-US"/>
           </a:p>
@@ -4319,7 +4317,7 @@
           <a:p>
             <a:fld id="{5BCAD085-E8A6-8845-BD4E-CB4CCA059FC4}" type="datetimeFigureOut">
               <a:rPr lang="en-US" smtClean="0"/>
-              <a:t>2/15/2026</a:t>
+              <a:t>4/12/2026</a:t>
             </a:fld>
             <a:endParaRPr lang="en-US"/>
           </a:p>
@@ -4445,7 +4443,7 @@
           <a:p>
             <a:fld id="{5BCAD085-E8A6-8845-BD4E-CB4CCA059FC4}" type="datetimeFigureOut">
               <a:rPr lang="en-US" smtClean="0"/>
-              <a:t>2/15/2026</a:t>
+              <a:t>4/12/2026</a:t>
             </a:fld>
             <a:endParaRPr lang="en-US"/>
           </a:p>
@@ -4700,7 +4698,7 @@
           <a:p>
             <a:fld id="{5BCAD085-E8A6-8845-BD4E-CB4CCA059FC4}" type="datetimeFigureOut">
               <a:rPr lang="en-US" smtClean="0"/>
-              <a:t>2/15/2026</a:t>
+              <a:t>4/12/2026</a:t>
             </a:fld>
             <a:endParaRPr lang="en-US"/>
           </a:p>
@@ -5014,7 +5012,7 @@
           <a:p>
             <a:fld id="{5BCAD085-E8A6-8845-BD4E-CB4CCA059FC4}" type="datetimeFigureOut">
               <a:rPr lang="en-US" smtClean="0"/>
-              <a:t>2/15/2026</a:t>
+              <a:t>4/12/2026</a:t>
             </a:fld>
             <a:endParaRPr lang="en-US"/>
           </a:p>
@@ -5365,7 +5363,7 @@
           <a:p>
             <a:fld id="{5BCAD085-E8A6-8845-BD4E-CB4CCA059FC4}" type="datetimeFigureOut">
               <a:rPr lang="en-US" smtClean="0"/>
-              <a:t>2/15/2026</a:t>
+              <a:t>4/12/2026</a:t>
             </a:fld>
             <a:endParaRPr lang="en-US"/>
           </a:p>
@@ -6042,7 +6040,13 @@
       </p:grpSpPr>
       <p:sp>
         <p:nvSpPr>
-          <p:cNvPr id="2" name="Title 1"/>
+          <p:cNvPr id="2" name="Title 1">
+            <a:extLst>
+              <a:ext uri="{FF2B5EF4-FFF2-40B4-BE49-F238E27FC236}">
+                <a16:creationId xmlns:a16="http://schemas.microsoft.com/office/drawing/2014/main" id="{CE29641B-50FF-B4AE-DC5B-7F8285DF8B5E}"/>
+              </a:ext>
+            </a:extLst>
+          </p:cNvPr>
           <p:cNvSpPr>
             <a:spLocks noGrp="1"/>
           </p:cNvSpPr>
@@ -6052,99 +6056,44 @@
         </p:nvSpPr>
         <p:spPr/>
         <p:txBody>
-          <a:bodyPr/>
-          <a:lstStyle/>
-          <a:p>
-            <a:r>
-              <a:rPr dirty="0">
+          <a:bodyPr>
+            <a:noAutofit/>
+          </a:bodyPr>
+          <a:lstStyle/>
+          <a:p>
+            <a:r>
+              <a:rPr lang="en-US" sz="3200" dirty="0">
                 <a:latin typeface="Bahnschrift" panose="020B0502040204020203" pitchFamily="34" charset="0"/>
               </a:rPr>
-              <a:t>Objectives</a:t>
-            </a:r>
-          </a:p>
-        </p:txBody>
-      </p:sp>
-      <p:sp>
-        <p:nvSpPr>
-          <p:cNvPr id="3" name="Content Placeholder 2"/>
-          <p:cNvSpPr>
-            <a:spLocks noGrp="1"/>
-          </p:cNvSpPr>
-          <p:nvPr>
-            <p:ph idx="1"/>
-          </p:nvPr>
-        </p:nvSpPr>
-        <p:spPr/>
-        <p:txBody>
-          <a:bodyPr/>
-          <a:lstStyle/>
-          <a:p>
-            <a:r>
-              <a:rPr dirty="0"/>
-              <a:t> </a:t>
-            </a:r>
-            <a:r>
-              <a:rPr dirty="0">
-                <a:latin typeface="Bahnschrift SemiCondensed" panose="020B0502040204020203" pitchFamily="34" charset="0"/>
-              </a:rPr>
-              <a:t>To analyze household energy usage patterns using ML.</a:t>
-            </a:r>
-          </a:p>
-          <a:p>
-            <a:r>
-              <a:rPr dirty="0">
-                <a:latin typeface="Bahnschrift SemiCondensed" panose="020B0502040204020203" pitchFamily="34" charset="0"/>
-              </a:rPr>
-              <a:t> To predict daily electricity consumption accurately.</a:t>
-            </a:r>
-          </a:p>
-          <a:p>
-            <a:r>
-              <a:rPr lang="en-IN" dirty="0">
-                <a:latin typeface="Bahnschrift SemiCondensed" panose="020B0502040204020203" pitchFamily="34" charset="0"/>
-              </a:rPr>
-              <a:t> </a:t>
-            </a:r>
-            <a:r>
-              <a:rPr dirty="0">
-                <a:latin typeface="Bahnschrift SemiCondensed" panose="020B0502040204020203" pitchFamily="34" charset="0"/>
-              </a:rPr>
-              <a:t>To help reduce bills via usage insights.</a:t>
-            </a:r>
-          </a:p>
-          <a:p>
-            <a:r>
-              <a:rPr dirty="0">
-                <a:latin typeface="Bahnschrift SemiCondensed" panose="020B0502040204020203" pitchFamily="34" charset="0"/>
-              </a:rPr>
-              <a:t> To build a real-time monitoring system</a:t>
-            </a:r>
-            <a:r>
-              <a:rPr dirty="0"/>
-              <a:t>.</a:t>
-            </a:r>
+              <a:t>Energy Consumption Prediction by Using Machine Learning for Smart Building: Case Study in Malaysia</a:t>
+            </a:r>
+            <a:endParaRPr lang="en-IN" sz="3200" dirty="0">
+              <a:latin typeface="Bahnschrift" panose="020B0502040204020203" pitchFamily="34" charset="0"/>
+            </a:endParaRPr>
           </a:p>
         </p:txBody>
       </p:sp>
       <p:pic>
         <p:nvPicPr>
-          <p:cNvPr id="5" name="Graphic 4" descr="Bullseye with solid fill">
+          <p:cNvPr id="5" name="Content Placeholder 4" descr="Body builder with solid fill">
             <a:extLst>
               <a:ext uri="{FF2B5EF4-FFF2-40B4-BE49-F238E27FC236}">
-                <a16:creationId xmlns:a16="http://schemas.microsoft.com/office/drawing/2014/main" id="{376408DB-966D-81D7-BF55-6B12FCF72D61}"/>
+                <a16:creationId xmlns:a16="http://schemas.microsoft.com/office/drawing/2014/main" id="{1B89BED1-C506-3B71-B63A-EDB251F9F40F}"/>
               </a:ext>
             </a:extLst>
           </p:cNvPr>
           <p:cNvPicPr>
-            <a:picLocks noChangeAspect="1"/>
+            <a:picLocks noGrp="1" noChangeAspect="1"/>
           </p:cNvPicPr>
-          <p:nvPr/>
+          <p:nvPr>
+            <p:ph idx="1"/>
+          </p:nvPr>
         </p:nvPicPr>
         <p:blipFill>
-          <a:blip r:embed="rId2">
+          <a:blip>
             <a:extLst>
               <a:ext uri="{96DAC541-7B7A-43D3-8B79-37D633B846F1}">
-                <asvg:svgBlip xmlns:asvg="http://schemas.microsoft.com/office/drawing/2016/SVG/main" r:embed="rId3"/>
+                <asvg:svgBlip xmlns:asvg="http://schemas.microsoft.com/office/drawing/2016/SVG/main" r:embed="rId2"/>
               </a:ext>
             </a:extLst>
           </a:blip>
@@ -6154,15 +6103,115 @@
         </p:blipFill>
         <p:spPr>
           <a:xfrm>
-            <a:off x="5777346" y="1237648"/>
-            <a:ext cx="758536" cy="758536"/>
+            <a:off x="7731705" y="1110070"/>
+            <a:ext cx="914400" cy="914400"/>
+          </a:xfrm>
+        </p:spPr>
+      </p:pic>
+      <p:sp>
+        <p:nvSpPr>
+          <p:cNvPr id="8" name="TextBox 7">
+            <a:extLst>
+              <a:ext uri="{FF2B5EF4-FFF2-40B4-BE49-F238E27FC236}">
+                <a16:creationId xmlns:a16="http://schemas.microsoft.com/office/drawing/2014/main" id="{9EEEDF00-3C3F-D101-2FCC-C9051A9C1006}"/>
+              </a:ext>
+            </a:extLst>
+          </p:cNvPr>
+          <p:cNvSpPr txBox="1"/>
+          <p:nvPr/>
+        </p:nvSpPr>
+        <p:spPr>
+          <a:xfrm>
+            <a:off x="1176866" y="2517058"/>
+            <a:ext cx="7012039" cy="4524315"/>
           </a:xfrm>
           <a:prstGeom prst="rect">
             <a:avLst/>
           </a:prstGeom>
+          <a:noFill/>
         </p:spPr>
-      </p:pic>
+        <p:txBody>
+          <a:bodyPr wrap="square" rtlCol="0">
+            <a:spAutoFit/>
+          </a:bodyPr>
+          <a:lstStyle/>
+          <a:p>
+            <a:r>
+              <a:rPr lang="en-US" sz="2000" dirty="0">
+                <a:latin typeface="Bahnschrift SemiCondensed" panose="020B0502040204020203" pitchFamily="34" charset="0"/>
+              </a:rPr>
+              <a:t> Machine learning models can accurately predict electricity consumption in real smart building scenarios using historical data.</a:t>
+            </a:r>
+          </a:p>
+          <a:p>
+            <a:endParaRPr lang="en-US" sz="2000" dirty="0">
+              <a:latin typeface="Bahnschrift SemiCondensed" panose="020B0502040204020203" pitchFamily="34" charset="0"/>
+            </a:endParaRPr>
+          </a:p>
+          <a:p>
+            <a:r>
+              <a:rPr lang="en-US" sz="2000" dirty="0">
+                <a:latin typeface="Bahnschrift SemiCondensed" panose="020B0502040204020203" pitchFamily="34" charset="0"/>
+              </a:rPr>
+              <a:t> Energy usage patterns differ significantly between individual tenants, even within the same commercial building.</a:t>
+            </a:r>
+          </a:p>
+          <a:p>
+            <a:endParaRPr lang="en-US" sz="2000" dirty="0">
+              <a:latin typeface="Bahnschrift SemiCondensed" panose="020B0502040204020203" pitchFamily="34" charset="0"/>
+            </a:endParaRPr>
+          </a:p>
+          <a:p>
+            <a:r>
+              <a:rPr lang="en-US" sz="2000" dirty="0">
+                <a:latin typeface="Bahnschrift SemiCondensed" panose="020B0502040204020203" pitchFamily="34" charset="0"/>
+              </a:rPr>
+              <a:t> No single machine learning algorithm consistently outperforms others; </a:t>
+            </a:r>
+            <a:r>
+              <a:rPr lang="en-US" sz="2000" b="1" dirty="0">
+                <a:latin typeface="Bahnschrift SemiCondensed" panose="020B0502040204020203" pitchFamily="34" charset="0"/>
+              </a:rPr>
+              <a:t>model effectiveness depends on tenant behavior and load characteristics</a:t>
+            </a:r>
+            <a:r>
+              <a:rPr lang="en-US" sz="2000" dirty="0">
+                <a:latin typeface="Bahnschrift SemiCondensed" panose="020B0502040204020203" pitchFamily="34" charset="0"/>
+              </a:rPr>
+              <a:t>.</a:t>
+            </a:r>
+          </a:p>
+          <a:p>
+            <a:endParaRPr lang="en-US" sz="2000" dirty="0">
+              <a:latin typeface="Bahnschrift SemiCondensed" panose="020B0502040204020203" pitchFamily="34" charset="0"/>
+            </a:endParaRPr>
+          </a:p>
+          <a:p>
+            <a:r>
+              <a:rPr lang="en-US" sz="2000" dirty="0">
+                <a:latin typeface="Bahnschrift SemiCondensed" panose="020B0502040204020203" pitchFamily="34" charset="0"/>
+              </a:rPr>
+              <a:t> Proper data preprocessing (cleaning and normalization) plays a crucial role in improving prediction performance.</a:t>
+            </a:r>
+          </a:p>
+          <a:p>
+            <a:endParaRPr lang="en-US" sz="2400" dirty="0">
+              <a:latin typeface="Bahnschrift SemiCondensed" panose="020B0502040204020203" pitchFamily="34" charset="0"/>
+            </a:endParaRPr>
+          </a:p>
+          <a:p>
+            <a:endParaRPr lang="en-IN" sz="2400" dirty="0">
+              <a:latin typeface="Bahnschrift SemiCondensed" panose="020B0502040204020203" pitchFamily="34" charset="0"/>
+            </a:endParaRPr>
+          </a:p>
+        </p:txBody>
+      </p:sp>
     </p:spTree>
+    <p:extLst>
+      <p:ext uri="{BB962C8B-B14F-4D97-AF65-F5344CB8AC3E}">
+        <p14:creationId xmlns:p14="http://schemas.microsoft.com/office/powerpoint/2010/main" val="722369955"/>
+      </p:ext>
+    </p:extLst>
   </p:cSld>
   <p:clrMapOvr>
     <a:masterClrMapping/>
@@ -6189,10 +6238,10 @@
       </p:grpSpPr>
       <p:sp>
         <p:nvSpPr>
-          <p:cNvPr id="2" name="Title 1">
+          <p:cNvPr id="3" name="Content Placeholder 2">
             <a:extLst>
               <a:ext uri="{FF2B5EF4-FFF2-40B4-BE49-F238E27FC236}">
-                <a16:creationId xmlns:a16="http://schemas.microsoft.com/office/drawing/2014/main" id="{99611F05-9A87-4AE2-4E3F-FE1F087A8B88}"/>
+                <a16:creationId xmlns:a16="http://schemas.microsoft.com/office/drawing/2014/main" id="{14E42765-0495-801B-C188-C82E08A3644F}"/>
               </a:ext>
             </a:extLst>
           </p:cNvPr>
@@ -6200,124 +6249,48 @@
             <a:spLocks noGrp="1"/>
           </p:cNvSpPr>
           <p:nvPr>
-            <p:ph type="title"/>
+            <p:ph idx="1"/>
           </p:nvPr>
         </p:nvSpPr>
         <p:spPr/>
         <p:txBody>
-          <a:bodyPr/>
-          <a:lstStyle/>
-          <a:p>
-            <a:r>
-              <a:rPr lang="en-IN" dirty="0">
-                <a:latin typeface="Bahnschrift" panose="020B0502040204020203" pitchFamily="34" charset="0"/>
-              </a:rPr>
-              <a:t>Future Research Potential</a:t>
-            </a:r>
-          </a:p>
-        </p:txBody>
-      </p:sp>
-      <p:sp>
-        <p:nvSpPr>
-          <p:cNvPr id="3" name="Content Placeholder 2">
-            <a:extLst>
-              <a:ext uri="{FF2B5EF4-FFF2-40B4-BE49-F238E27FC236}">
-                <a16:creationId xmlns:a16="http://schemas.microsoft.com/office/drawing/2014/main" id="{2B0A8B65-366E-E757-6F86-0388ABEFB327}"/>
-              </a:ext>
-            </a:extLst>
-          </p:cNvPr>
-          <p:cNvSpPr>
-            <a:spLocks noGrp="1"/>
-          </p:cNvSpPr>
-          <p:nvPr>
-            <p:ph idx="1"/>
-          </p:nvPr>
-        </p:nvSpPr>
-        <p:spPr/>
-        <p:txBody>
           <a:bodyPr>
-            <a:normAutofit fontScale="92500" lnSpcReduction="20000"/>
+            <a:normAutofit/>
           </a:bodyPr>
           <a:lstStyle/>
           <a:p>
             <a:r>
-              <a:rPr lang="en-US" b="1" u="sng" dirty="0">
+              <a:rPr lang="en-US" sz="2000" dirty="0">
                 <a:latin typeface="Bahnschrift SemiCondensed" panose="020B0502040204020203" pitchFamily="34" charset="0"/>
               </a:rPr>
-              <a:t>Integration of IoT and Smart Home Devices</a:t>
-            </a:r>
-            <a:r>
-              <a:rPr lang="en-US" dirty="0">
+              <a:t>Cloud-based tools such as Microsoft Azure Machine Learning Studio are suitable for implementing scalable energy prediction systems</a:t>
+            </a:r>
+          </a:p>
+          <a:p>
+            <a:r>
+              <a:rPr lang="en-US" sz="2000" dirty="0">
                 <a:latin typeface="Bahnschrift SemiCondensed" panose="020B0502040204020203" pitchFamily="34" charset="0"/>
               </a:rPr>
-              <a:t> Future work could explore integrating IoT sensors to provide real-time energy data from appliances. Combining ML with IoT allows dynamic prediction and instant feedback, helping households act on predictions instantly. Reinforcement</a:t>
-            </a:r>
-          </a:p>
-          <a:p>
-            <a:r>
-              <a:rPr lang="en-US" dirty="0">
+              <a:t>Evaluation metrics like RMSE, NRMSE, and MAPE provide reliable measures for assessing prediction accuracy.</a:t>
+            </a:r>
+          </a:p>
+          <a:p>
+            <a:r>
+              <a:rPr lang="en-US" sz="2000" dirty="0">
                 <a:latin typeface="Bahnschrift SemiCondensed" panose="020B0502040204020203" pitchFamily="34" charset="0"/>
               </a:rPr>
-              <a:t> </a:t>
-            </a:r>
-            <a:r>
-              <a:rPr lang="en-US" b="1" u="sng" dirty="0">
-                <a:latin typeface="Bahnschrift SemiCondensed" panose="020B0502040204020203" pitchFamily="34" charset="0"/>
-              </a:rPr>
-              <a:t>Learning for Energy Optimization</a:t>
-            </a:r>
-            <a:r>
-              <a:rPr lang="en-US" dirty="0">
-                <a:latin typeface="Bahnschrift SemiCondensed" panose="020B0502040204020203" pitchFamily="34" charset="0"/>
-              </a:rPr>
-              <a:t> Instead of just predicting, models could learn to control appliances automatically to minimize waste — for example, turning off devices when energy demand peaks. Reinforcement learning agents can continuously improve decisions based on user comfort and cost trade-offs.</a:t>
-            </a:r>
-            <a:endParaRPr lang="en-IN" dirty="0">
+              <a:t>Accurate energy forecasting supports energy efficiency and informed decision-making in smart building management.</a:t>
+            </a:r>
+            <a:endParaRPr lang="en-IN" sz="2000" dirty="0">
               <a:latin typeface="Bahnschrift SemiCondensed" panose="020B0502040204020203" pitchFamily="34" charset="0"/>
             </a:endParaRPr>
           </a:p>
         </p:txBody>
       </p:sp>
-      <p:pic>
-        <p:nvPicPr>
-          <p:cNvPr id="5" name="Graphic 4" descr="Flask with solid fill">
-            <a:extLst>
-              <a:ext uri="{FF2B5EF4-FFF2-40B4-BE49-F238E27FC236}">
-                <a16:creationId xmlns:a16="http://schemas.microsoft.com/office/drawing/2014/main" id="{33182861-824A-92FC-FD88-64637EE7A3D9}"/>
-              </a:ext>
-            </a:extLst>
-          </p:cNvPr>
-          <p:cNvPicPr>
-            <a:picLocks noChangeAspect="1"/>
-          </p:cNvPicPr>
-          <p:nvPr/>
-        </p:nvPicPr>
-        <p:blipFill>
-          <a:blip r:embed="rId2">
-            <a:extLst>
-              <a:ext uri="{96DAC541-7B7A-43D3-8B79-37D633B846F1}">
-                <asvg:svgBlip xmlns:asvg="http://schemas.microsoft.com/office/drawing/2016/SVG/main" r:embed="rId3"/>
-              </a:ext>
-            </a:extLst>
-          </a:blip>
-          <a:stretch>
-            <a:fillRect/>
-          </a:stretch>
-        </p:blipFill>
-        <p:spPr>
-          <a:xfrm>
-            <a:off x="7315199" y="1039090"/>
-            <a:ext cx="914400" cy="768927"/>
-          </a:xfrm>
-          <a:prstGeom prst="rect">
-            <a:avLst/>
-          </a:prstGeom>
-        </p:spPr>
-      </p:pic>
     </p:spTree>
     <p:extLst>
       <p:ext uri="{BB962C8B-B14F-4D97-AF65-F5344CB8AC3E}">
-        <p14:creationId xmlns:p14="http://schemas.microsoft.com/office/powerpoint/2010/main" val="3314885238"/>
+        <p14:creationId xmlns:p14="http://schemas.microsoft.com/office/powerpoint/2010/main" val="972607472"/>
       </p:ext>
     </p:extLst>
   </p:cSld>
@@ -6346,10 +6319,10 @@
       </p:grpSpPr>
       <p:sp>
         <p:nvSpPr>
-          <p:cNvPr id="3" name="Content Placeholder 2">
+          <p:cNvPr id="2" name="Title 1">
             <a:extLst>
               <a:ext uri="{FF2B5EF4-FFF2-40B4-BE49-F238E27FC236}">
-                <a16:creationId xmlns:a16="http://schemas.microsoft.com/office/drawing/2014/main" id="{018C4862-9C96-F536-326D-14444F656A46}"/>
+                <a16:creationId xmlns:a16="http://schemas.microsoft.com/office/drawing/2014/main" id="{E217EB47-B371-8844-4D90-AC0AF05E14DE}"/>
               </a:ext>
             </a:extLst>
           </p:cNvPr>
@@ -6357,52 +6330,665 @@
             <a:spLocks noGrp="1"/>
           </p:cNvSpPr>
           <p:nvPr>
+            <p:ph type="title"/>
+          </p:nvPr>
+        </p:nvSpPr>
+        <p:spPr/>
+        <p:txBody>
+          <a:bodyPr>
+            <a:normAutofit fontScale="90000"/>
+          </a:bodyPr>
+          <a:lstStyle/>
+          <a:p>
+            <a:r>
+              <a:rPr lang="it-IT" b="1" dirty="0"/>
+              <a:t>Non-Intrusive Load Monitoring (NILM)</a:t>
+            </a:r>
+            <a:br>
+              <a:rPr lang="it-IT" b="1" dirty="0"/>
+            </a:br>
+            <a:r>
+              <a:rPr lang="it-IT" i="1" dirty="0"/>
+              <a:t>(</a:t>
+            </a:r>
+            <a:r>
+              <a:rPr lang="it-IT" i="1" dirty="0">
+                <a:latin typeface="Bahnschrift" panose="020B0502040204020203" pitchFamily="34" charset="0"/>
+              </a:rPr>
+              <a:t>Parson</a:t>
+            </a:r>
+            <a:r>
+              <a:rPr lang="it-IT" i="1" dirty="0"/>
+              <a:t> </a:t>
+            </a:r>
+            <a:r>
+              <a:rPr lang="it-IT" i="1" dirty="0">
+                <a:latin typeface="Bahnschrift" panose="020B0502040204020203" pitchFamily="34" charset="0"/>
+              </a:rPr>
+              <a:t>et al., IEEE, 2012</a:t>
+            </a:r>
+            <a:r>
+              <a:rPr lang="it-IT" i="1" dirty="0"/>
+              <a:t>)</a:t>
+            </a:r>
+            <a:br>
+              <a:rPr lang="it-IT" dirty="0"/>
+            </a:br>
+            <a:endParaRPr lang="en-IN" dirty="0">
+              <a:latin typeface="Bahnschrift" panose="020B0502040204020203" pitchFamily="34" charset="0"/>
+            </a:endParaRPr>
+          </a:p>
+        </p:txBody>
+      </p:sp>
+      <p:sp>
+        <p:nvSpPr>
+          <p:cNvPr id="5" name="Rectangle 2">
+            <a:extLst>
+              <a:ext uri="{FF2B5EF4-FFF2-40B4-BE49-F238E27FC236}">
+                <a16:creationId xmlns:a16="http://schemas.microsoft.com/office/drawing/2014/main" id="{05D63FF5-CEF7-4E4D-35D1-E5E73E2F6240}"/>
+              </a:ext>
+            </a:extLst>
+          </p:cNvPr>
+          <p:cNvSpPr>
+            <a:spLocks noGrp="1" noChangeArrowheads="1"/>
+          </p:cNvSpPr>
+          <p:nvPr>
             <p:ph idx="1"/>
           </p:nvPr>
         </p:nvSpPr>
-        <p:spPr/>
-        <p:txBody>
-          <a:bodyPr>
-            <a:normAutofit fontScale="92500" lnSpcReduction="10000"/>
+        <p:spPr bwMode="auto">
+          <a:xfrm>
+            <a:off x="667711" y="1962482"/>
+            <a:ext cx="7568097" cy="4370427"/>
+          </a:xfrm>
+          <a:prstGeom prst="rect">
+            <a:avLst/>
+          </a:prstGeom>
+          <a:noFill/>
+          <a:ln>
+            <a:noFill/>
+          </a:ln>
+          <a:effectLst/>
+          <a:extLst>
+            <a:ext uri="{909E8E84-426E-40DD-AFC4-6F175D3DCCD1}">
+              <a14:hiddenFill xmlns:a14="http://schemas.microsoft.com/office/drawing/2010/main">
+                <a:solidFill>
+                  <a:schemeClr val="accent1"/>
+                </a:solidFill>
+              </a14:hiddenFill>
+            </a:ext>
+            <a:ext uri="{91240B29-F687-4F45-9708-019B960494DF}">
+              <a14:hiddenLine xmlns:a14="http://schemas.microsoft.com/office/drawing/2010/main" w="9525">
+                <a:solidFill>
+                  <a:schemeClr val="tx1"/>
+                </a:solidFill>
+                <a:miter lim="800000"/>
+                <a:headEnd/>
+                <a:tailEnd/>
+              </a14:hiddenLine>
+            </a:ext>
+            <a:ext uri="{AF507438-7753-43E0-B8FC-AC1667EBCBE1}">
+              <a14:hiddenEffects xmlns:a14="http://schemas.microsoft.com/office/drawing/2010/main">
+                <a:effectLst>
+                  <a:outerShdw dist="35921" dir="2700000" algn="ctr" rotWithShape="0">
+                    <a:schemeClr val="bg2"/>
+                  </a:outerShdw>
+                </a:effectLst>
+              </a14:hiddenEffects>
+            </a:ext>
+          </a:extLst>
+        </p:spPr>
+        <p:txBody>
+          <a:bodyPr vert="horz" wrap="none" lIns="91440" tIns="45720" rIns="91440" bIns="45720" numCol="1" anchor="ctr" anchorCtr="0" compatLnSpc="1">
+            <a:prstTxWarp prst="textNoShape">
+              <a:avLst/>
+            </a:prstTxWarp>
+            <a:spAutoFit/>
           </a:bodyPr>
           <a:lstStyle/>
           <a:p>
-            <a:r>
-              <a:rPr lang="en-US" b="1" u="sng" dirty="0">
+            <a:pPr marL="0" marR="0" lvl="0" indent="0" algn="l" defTabSz="914400" rtl="0" eaLnBrk="0" fontAlgn="base" latinLnBrk="0" hangingPunct="0">
+              <a:lnSpc>
+                <a:spcPct val="100000"/>
+              </a:lnSpc>
+              <a:spcBef>
+                <a:spcPct val="0"/>
+              </a:spcBef>
+              <a:spcAft>
+                <a:spcPct val="0"/>
+              </a:spcAft>
+              <a:buClrTx/>
+              <a:buSzTx/>
+              <a:buFontTx/>
+              <a:buNone/>
+              <a:tabLst/>
+            </a:pPr>
+            <a:endParaRPr kumimoji="0" lang="en-US" altLang="en-US" sz="1800" b="0" i="0" u="none" strike="noStrike" cap="none" normalizeH="0" baseline="0" dirty="0">
+              <a:ln>
+                <a:noFill/>
+              </a:ln>
+              <a:solidFill>
+                <a:schemeClr val="tx1"/>
+              </a:solidFill>
+              <a:effectLst/>
+              <a:latin typeface="Arial" panose="020B0604020202020204" pitchFamily="34" charset="0"/>
+            </a:endParaRPr>
+          </a:p>
+          <a:p>
+            <a:pPr marL="0" marR="0" lvl="0" indent="0" algn="l" defTabSz="914400" rtl="0" eaLnBrk="0" fontAlgn="base" latinLnBrk="0" hangingPunct="0">
+              <a:lnSpc>
+                <a:spcPct val="100000"/>
+              </a:lnSpc>
+              <a:spcBef>
+                <a:spcPct val="0"/>
+              </a:spcBef>
+              <a:spcAft>
+                <a:spcPct val="0"/>
+              </a:spcAft>
+              <a:buClrTx/>
+              <a:buSzTx/>
+              <a:buFontTx/>
+              <a:buChar char="•"/>
+              <a:tabLst/>
+            </a:pPr>
+            <a:r>
+              <a:rPr kumimoji="0" lang="en-US" altLang="en-US" sz="2000" b="0" i="0" u="none" strike="noStrike" cap="none" normalizeH="0" baseline="0" dirty="0">
+                <a:ln>
+                  <a:noFill/>
+                </a:ln>
+                <a:solidFill>
+                  <a:schemeClr val="tx1"/>
+                </a:solidFill>
+                <a:effectLst/>
                 <a:latin typeface="Bahnschrift SemiCondensed" panose="020B0502040204020203" pitchFamily="34" charset="0"/>
               </a:rPr>
-              <a:t>Transfer Learning Across Regions </a:t>
-            </a:r>
-            <a:r>
-              <a:rPr lang="en-US" dirty="0">
+              <a:t>NILM enables </a:t>
+            </a:r>
+            <a:r>
+              <a:rPr kumimoji="0" lang="en-US" altLang="en-US" sz="2000" b="1" i="0" u="none" strike="noStrike" cap="none" normalizeH="0" baseline="0" dirty="0">
+                <a:ln>
+                  <a:noFill/>
+                </a:ln>
+                <a:solidFill>
+                  <a:schemeClr val="tx1"/>
+                </a:solidFill>
+                <a:effectLst/>
                 <a:latin typeface="Bahnschrift SemiCondensed" panose="020B0502040204020203" pitchFamily="34" charset="0"/>
               </a:rPr>
-              <a:t>Develop models that can adapt to new geographical locations or households with little data, improving scalability and global usability. Helps apply your system beyond a single dataset or country (e.g., India → global deployment).</a:t>
-            </a:r>
-          </a:p>
-          <a:p>
-            <a:r>
-              <a:rPr lang="en-US" b="1" u="sng" dirty="0">
+              <a:t>appliance-level energy analysis</a:t>
+            </a:r>
+            <a:r>
+              <a:rPr kumimoji="0" lang="en-US" altLang="en-US" sz="2000" b="0" i="0" u="none" strike="noStrike" cap="none" normalizeH="0" baseline="0" dirty="0">
+                <a:ln>
+                  <a:noFill/>
+                </a:ln>
+                <a:solidFill>
+                  <a:schemeClr val="tx1"/>
+                </a:solidFill>
+                <a:effectLst/>
                 <a:latin typeface="Bahnschrift SemiCondensed" panose="020B0502040204020203" pitchFamily="34" charset="0"/>
               </a:rPr>
-              <a:t>Carbon Footprint Prediction and Sustainability </a:t>
-            </a:r>
-            <a:r>
-              <a:rPr lang="en-US" dirty="0">
+              <a:t> using a single smart meter</a:t>
+            </a:r>
+          </a:p>
+          <a:p>
+            <a:pPr marL="0" marR="0" lvl="0" indent="0" algn="l" defTabSz="914400" rtl="0" eaLnBrk="0" fontAlgn="base" latinLnBrk="0" hangingPunct="0">
+              <a:lnSpc>
+                <a:spcPct val="100000"/>
+              </a:lnSpc>
+              <a:spcBef>
+                <a:spcPct val="0"/>
+              </a:spcBef>
+              <a:spcAft>
+                <a:spcPct val="0"/>
+              </a:spcAft>
+              <a:buClrTx/>
+              <a:buSzTx/>
+              <a:buNone/>
+              <a:tabLst/>
+            </a:pPr>
+            <a:r>
+              <a:rPr lang="en-US" altLang="en-US" sz="2000" dirty="0">
+                <a:solidFill>
+                  <a:schemeClr val="tx1"/>
+                </a:solidFill>
                 <a:latin typeface="Bahnschrift SemiCondensed" panose="020B0502040204020203" pitchFamily="34" charset="0"/>
               </a:rPr>
-              <a:t>Integration Extend your model to predict environmental impact, linking energy consumption to carbon emissions. This would align household predictions with sustainability and climate goals.</a:t>
-            </a:r>
-            <a:endParaRPr lang="en-IN" dirty="0">
+              <a:t> </a:t>
+            </a:r>
+            <a:r>
+              <a:rPr kumimoji="0" lang="en-US" altLang="en-US" sz="2000" b="0" i="0" u="none" strike="noStrike" cap="none" normalizeH="0" baseline="0" dirty="0">
+                <a:ln>
+                  <a:noFill/>
+                </a:ln>
+                <a:solidFill>
+                  <a:schemeClr val="tx1"/>
+                </a:solidFill>
+                <a:effectLst/>
+                <a:latin typeface="Bahnschrift SemiCondensed" panose="020B0502040204020203" pitchFamily="34" charset="0"/>
+              </a:rPr>
+              <a:t>(no sensors required on each device) </a:t>
+            </a:r>
+          </a:p>
+          <a:p>
+            <a:pPr marL="0" marR="0" lvl="0" indent="0" algn="l" defTabSz="914400" rtl="0" eaLnBrk="0" fontAlgn="base" latinLnBrk="0" hangingPunct="0">
+              <a:lnSpc>
+                <a:spcPct val="100000"/>
+              </a:lnSpc>
+              <a:spcBef>
+                <a:spcPct val="0"/>
+              </a:spcBef>
+              <a:spcAft>
+                <a:spcPct val="0"/>
+              </a:spcAft>
+              <a:buClrTx/>
+              <a:buSzTx/>
+              <a:buNone/>
+              <a:tabLst/>
+            </a:pPr>
+            <a:endParaRPr kumimoji="0" lang="en-US" altLang="en-US" sz="2000" b="0" i="0" u="none" strike="noStrike" cap="none" normalizeH="0" baseline="0" dirty="0">
+              <a:ln>
+                <a:noFill/>
+              </a:ln>
+              <a:solidFill>
+                <a:schemeClr val="tx1"/>
+              </a:solidFill>
+              <a:effectLst/>
               <a:latin typeface="Bahnschrift SemiCondensed" panose="020B0502040204020203" pitchFamily="34" charset="0"/>
             </a:endParaRPr>
+          </a:p>
+          <a:p>
+            <a:pPr marL="0" marR="0" lvl="0" indent="0" algn="l" defTabSz="914400" rtl="0" eaLnBrk="0" fontAlgn="base" latinLnBrk="0" hangingPunct="0">
+              <a:lnSpc>
+                <a:spcPct val="100000"/>
+              </a:lnSpc>
+              <a:spcBef>
+                <a:spcPct val="0"/>
+              </a:spcBef>
+              <a:spcAft>
+                <a:spcPct val="0"/>
+              </a:spcAft>
+              <a:buClrTx/>
+              <a:buSzTx/>
+              <a:buFontTx/>
+              <a:buChar char="•"/>
+              <a:tabLst/>
+            </a:pPr>
+            <a:r>
+              <a:rPr kumimoji="0" lang="en-US" altLang="en-US" sz="2000" b="0" i="0" u="none" strike="noStrike" cap="none" normalizeH="0" baseline="0" dirty="0">
+                <a:ln>
+                  <a:noFill/>
+                </a:ln>
+                <a:solidFill>
+                  <a:schemeClr val="tx1"/>
+                </a:solidFill>
+                <a:effectLst/>
+                <a:latin typeface="Bahnschrift SemiCondensed" panose="020B0502040204020203" pitchFamily="34" charset="0"/>
+              </a:rPr>
+              <a:t>Uses </a:t>
+            </a:r>
+            <a:r>
+              <a:rPr kumimoji="0" lang="en-US" altLang="en-US" sz="2000" b="1" i="0" u="none" strike="noStrike" cap="none" normalizeH="0" baseline="0" dirty="0">
+                <a:ln>
+                  <a:noFill/>
+                </a:ln>
+                <a:solidFill>
+                  <a:schemeClr val="tx1"/>
+                </a:solidFill>
+                <a:effectLst/>
+                <a:latin typeface="Bahnschrift SemiCondensed" panose="020B0502040204020203" pitchFamily="34" charset="0"/>
+              </a:rPr>
+              <a:t>machine learning and signal patterns</a:t>
+            </a:r>
+            <a:r>
+              <a:rPr kumimoji="0" lang="en-US" altLang="en-US" sz="2000" b="0" i="0" u="none" strike="noStrike" cap="none" normalizeH="0" baseline="0" dirty="0">
+                <a:ln>
+                  <a:noFill/>
+                </a:ln>
+                <a:solidFill>
+                  <a:schemeClr val="tx1"/>
+                </a:solidFill>
+                <a:effectLst/>
+                <a:latin typeface="Bahnschrift SemiCondensed" panose="020B0502040204020203" pitchFamily="34" charset="0"/>
+              </a:rPr>
+              <a:t> to identify individual </a:t>
+            </a:r>
+          </a:p>
+          <a:p>
+            <a:pPr marL="0" marR="0" lvl="0" indent="0" algn="l" defTabSz="914400" rtl="0" eaLnBrk="0" fontAlgn="base" latinLnBrk="0" hangingPunct="0">
+              <a:lnSpc>
+                <a:spcPct val="100000"/>
+              </a:lnSpc>
+              <a:spcBef>
+                <a:spcPct val="0"/>
+              </a:spcBef>
+              <a:spcAft>
+                <a:spcPct val="0"/>
+              </a:spcAft>
+              <a:buClrTx/>
+              <a:buSzTx/>
+              <a:buNone/>
+              <a:tabLst/>
+            </a:pPr>
+            <a:r>
+              <a:rPr lang="en-US" altLang="en-US" sz="2000" dirty="0">
+                <a:solidFill>
+                  <a:schemeClr val="tx1"/>
+                </a:solidFill>
+                <a:latin typeface="Bahnschrift SemiCondensed" panose="020B0502040204020203" pitchFamily="34" charset="0"/>
+              </a:rPr>
+              <a:t> </a:t>
+            </a:r>
+            <a:r>
+              <a:rPr kumimoji="0" lang="en-US" altLang="en-US" sz="2000" b="0" i="0" u="none" strike="noStrike" cap="none" normalizeH="0" baseline="0" dirty="0">
+                <a:ln>
+                  <a:noFill/>
+                </a:ln>
+                <a:solidFill>
+                  <a:schemeClr val="tx1"/>
+                </a:solidFill>
+                <a:effectLst/>
+                <a:latin typeface="Bahnschrift SemiCondensed" panose="020B0502040204020203" pitchFamily="34" charset="0"/>
+              </a:rPr>
+              <a:t>appliances from total power consumption </a:t>
+            </a:r>
+          </a:p>
+          <a:p>
+            <a:pPr marL="0" marR="0" lvl="0" indent="0" algn="l" defTabSz="914400" rtl="0" eaLnBrk="0" fontAlgn="base" latinLnBrk="0" hangingPunct="0">
+              <a:lnSpc>
+                <a:spcPct val="100000"/>
+              </a:lnSpc>
+              <a:spcBef>
+                <a:spcPct val="0"/>
+              </a:spcBef>
+              <a:spcAft>
+                <a:spcPct val="0"/>
+              </a:spcAft>
+              <a:buClrTx/>
+              <a:buSzTx/>
+              <a:buFontTx/>
+              <a:buChar char="•"/>
+              <a:tabLst/>
+            </a:pPr>
+            <a:r>
+              <a:rPr kumimoji="0" lang="en-US" altLang="en-US" sz="2000" b="0" i="0" u="none" strike="noStrike" cap="none" normalizeH="0" baseline="0" dirty="0">
+                <a:ln>
+                  <a:noFill/>
+                </a:ln>
+                <a:solidFill>
+                  <a:schemeClr val="tx1"/>
+                </a:solidFill>
+                <a:effectLst/>
+                <a:latin typeface="Bahnschrift SemiCondensed" panose="020B0502040204020203" pitchFamily="34" charset="0"/>
+              </a:rPr>
+              <a:t>Key finding: A few high-power appliances (AC, heater) </a:t>
+            </a:r>
+          </a:p>
+          <a:p>
+            <a:pPr marL="0" marR="0" lvl="0" indent="0" algn="l" defTabSz="914400" rtl="0" eaLnBrk="0" fontAlgn="base" latinLnBrk="0" hangingPunct="0">
+              <a:lnSpc>
+                <a:spcPct val="100000"/>
+              </a:lnSpc>
+              <a:spcBef>
+                <a:spcPct val="0"/>
+              </a:spcBef>
+              <a:spcAft>
+                <a:spcPct val="0"/>
+              </a:spcAft>
+              <a:buClrTx/>
+              <a:buSzTx/>
+              <a:buNone/>
+              <a:tabLst/>
+            </a:pPr>
+            <a:r>
+              <a:rPr lang="en-US" altLang="en-US" sz="2000" dirty="0">
+                <a:solidFill>
+                  <a:schemeClr val="tx1"/>
+                </a:solidFill>
+                <a:latin typeface="Bahnschrift SemiCondensed" panose="020B0502040204020203" pitchFamily="34" charset="0"/>
+              </a:rPr>
+              <a:t> </a:t>
+            </a:r>
+            <a:r>
+              <a:rPr kumimoji="0" lang="en-US" altLang="en-US" sz="2000" b="0" i="0" u="none" strike="noStrike" cap="none" normalizeH="0" baseline="0" dirty="0">
+                <a:ln>
+                  <a:noFill/>
+                </a:ln>
+                <a:solidFill>
+                  <a:schemeClr val="tx1"/>
+                </a:solidFill>
+                <a:effectLst/>
+                <a:latin typeface="Bahnschrift SemiCondensed" panose="020B0502040204020203" pitchFamily="34" charset="0"/>
+              </a:rPr>
+              <a:t>contribute most of the energy usage </a:t>
+            </a:r>
+          </a:p>
+          <a:p>
+            <a:pPr marL="0" marR="0" lvl="0" indent="0" algn="l" defTabSz="914400" rtl="0" eaLnBrk="0" fontAlgn="base" latinLnBrk="0" hangingPunct="0">
+              <a:lnSpc>
+                <a:spcPct val="100000"/>
+              </a:lnSpc>
+              <a:spcBef>
+                <a:spcPct val="0"/>
+              </a:spcBef>
+              <a:spcAft>
+                <a:spcPct val="0"/>
+              </a:spcAft>
+              <a:buClrTx/>
+              <a:buSzTx/>
+              <a:buNone/>
+              <a:tabLst/>
+            </a:pPr>
+            <a:endParaRPr kumimoji="0" lang="en-US" altLang="en-US" sz="2000" b="0" i="0" u="none" strike="noStrike" cap="none" normalizeH="0" baseline="0" dirty="0">
+              <a:ln>
+                <a:noFill/>
+              </a:ln>
+              <a:solidFill>
+                <a:schemeClr val="tx1"/>
+              </a:solidFill>
+              <a:effectLst/>
+              <a:latin typeface="Bahnschrift SemiCondensed" panose="020B0502040204020203" pitchFamily="34" charset="0"/>
+            </a:endParaRPr>
+          </a:p>
+          <a:p>
+            <a:pPr marL="0" marR="0" lvl="0" indent="0" algn="l" defTabSz="914400" rtl="0" eaLnBrk="0" fontAlgn="base" latinLnBrk="0" hangingPunct="0">
+              <a:lnSpc>
+                <a:spcPct val="100000"/>
+              </a:lnSpc>
+              <a:spcBef>
+                <a:spcPct val="0"/>
+              </a:spcBef>
+              <a:spcAft>
+                <a:spcPct val="0"/>
+              </a:spcAft>
+              <a:buClrTx/>
+              <a:buSzTx/>
+              <a:buFontTx/>
+              <a:buChar char="•"/>
+              <a:tabLst/>
+            </a:pPr>
+            <a:r>
+              <a:rPr kumimoji="0" lang="en-US" altLang="en-US" sz="2000" b="0" i="0" u="none" strike="noStrike" cap="none" normalizeH="0" baseline="0" dirty="0">
+                <a:ln>
+                  <a:noFill/>
+                </a:ln>
+                <a:solidFill>
+                  <a:schemeClr val="tx1"/>
+                </a:solidFill>
+                <a:effectLst/>
+                <a:latin typeface="Bahnschrift SemiCondensed" panose="020B0502040204020203" pitchFamily="34" charset="0"/>
+              </a:rPr>
+              <a:t>Provides </a:t>
+            </a:r>
+            <a:r>
+              <a:rPr kumimoji="0" lang="en-US" altLang="en-US" sz="2000" b="1" i="0" u="none" strike="noStrike" cap="none" normalizeH="0" baseline="0" dirty="0">
+                <a:ln>
+                  <a:noFill/>
+                </a:ln>
+                <a:solidFill>
+                  <a:schemeClr val="tx1"/>
+                </a:solidFill>
+                <a:effectLst/>
+                <a:latin typeface="Bahnschrift SemiCondensed" panose="020B0502040204020203" pitchFamily="34" charset="0"/>
+              </a:rPr>
+              <a:t>actionable insights</a:t>
+            </a:r>
+            <a:r>
+              <a:rPr kumimoji="0" lang="en-US" altLang="en-US" sz="2000" b="0" i="0" u="none" strike="noStrike" cap="none" normalizeH="0" baseline="0" dirty="0">
+                <a:ln>
+                  <a:noFill/>
+                </a:ln>
+                <a:solidFill>
+                  <a:schemeClr val="tx1"/>
+                </a:solidFill>
+                <a:effectLst/>
+                <a:latin typeface="Bahnschrift SemiCondensed" panose="020B0502040204020203" pitchFamily="34" charset="0"/>
+              </a:rPr>
+              <a:t> (where energy is used),</a:t>
+            </a:r>
+          </a:p>
+          <a:p>
+            <a:pPr marL="0" marR="0" lvl="0" indent="0" algn="l" defTabSz="914400" rtl="0" eaLnBrk="0" fontAlgn="base" latinLnBrk="0" hangingPunct="0">
+              <a:lnSpc>
+                <a:spcPct val="100000"/>
+              </a:lnSpc>
+              <a:spcBef>
+                <a:spcPct val="0"/>
+              </a:spcBef>
+              <a:spcAft>
+                <a:spcPct val="0"/>
+              </a:spcAft>
+              <a:buClrTx/>
+              <a:buSzTx/>
+              <a:buNone/>
+              <a:tabLst/>
+            </a:pPr>
+            <a:r>
+              <a:rPr lang="en-US" altLang="en-US" sz="2000" dirty="0">
+                <a:solidFill>
+                  <a:schemeClr val="tx1"/>
+                </a:solidFill>
+                <a:latin typeface="Bahnschrift SemiCondensed" panose="020B0502040204020203" pitchFamily="34" charset="0"/>
+              </a:rPr>
+              <a:t> </a:t>
+            </a:r>
+            <a:r>
+              <a:rPr kumimoji="0" lang="en-US" altLang="en-US" sz="2000" b="0" i="0" u="none" strike="noStrike" cap="none" normalizeH="0" baseline="0" dirty="0">
+                <a:ln>
+                  <a:noFill/>
+                </a:ln>
+                <a:solidFill>
+                  <a:schemeClr val="tx1"/>
+                </a:solidFill>
+                <a:effectLst/>
+                <a:latin typeface="Bahnschrift SemiCondensed" panose="020B0502040204020203" pitchFamily="34" charset="0"/>
+              </a:rPr>
+              <a:t>unlike traditional models that only predict total consumption </a:t>
+            </a:r>
+          </a:p>
+          <a:p>
+            <a:pPr marL="0" marR="0" lvl="0" indent="0" algn="l" defTabSz="914400" rtl="0" eaLnBrk="0" fontAlgn="base" latinLnBrk="0" hangingPunct="0">
+              <a:lnSpc>
+                <a:spcPct val="100000"/>
+              </a:lnSpc>
+              <a:spcBef>
+                <a:spcPct val="0"/>
+              </a:spcBef>
+              <a:spcAft>
+                <a:spcPct val="0"/>
+              </a:spcAft>
+              <a:buClrTx/>
+              <a:buSzTx/>
+              <a:buNone/>
+              <a:tabLst/>
+            </a:pPr>
+            <a:endParaRPr kumimoji="0" lang="en-US" altLang="en-US" sz="2000" b="0" i="0" u="none" strike="noStrike" cap="none" normalizeH="0" baseline="0" dirty="0">
+              <a:ln>
+                <a:noFill/>
+              </a:ln>
+              <a:solidFill>
+                <a:schemeClr val="tx1"/>
+              </a:solidFill>
+              <a:effectLst/>
+              <a:latin typeface="Bahnschrift SemiCondensed" panose="020B0502040204020203" pitchFamily="34" charset="0"/>
+            </a:endParaRPr>
+          </a:p>
+          <a:p>
+            <a:pPr marL="0" marR="0" lvl="0" indent="0" algn="l" defTabSz="914400" rtl="0" eaLnBrk="0" fontAlgn="base" latinLnBrk="0" hangingPunct="0">
+              <a:lnSpc>
+                <a:spcPct val="100000"/>
+              </a:lnSpc>
+              <a:spcBef>
+                <a:spcPct val="0"/>
+              </a:spcBef>
+              <a:spcAft>
+                <a:spcPct val="0"/>
+              </a:spcAft>
+              <a:buClrTx/>
+              <a:buSzTx/>
+              <a:buFontTx/>
+              <a:buChar char="•"/>
+              <a:tabLst/>
+            </a:pPr>
+            <a:r>
+              <a:rPr kumimoji="0" lang="en-US" altLang="en-US" sz="2000" b="0" i="0" u="none" strike="noStrike" cap="none" normalizeH="0" baseline="0" dirty="0">
+                <a:ln>
+                  <a:noFill/>
+                </a:ln>
+                <a:solidFill>
+                  <a:schemeClr val="tx1"/>
+                </a:solidFill>
+                <a:effectLst/>
+                <a:latin typeface="Bahnschrift SemiCondensed" panose="020B0502040204020203" pitchFamily="34" charset="0"/>
+              </a:rPr>
+              <a:t>Limitation: Difficulty in distinguishing similar appliances and requires </a:t>
+            </a:r>
+          </a:p>
+          <a:p>
+            <a:pPr marL="0" marR="0" lvl="0" indent="0" algn="l" defTabSz="914400" rtl="0" eaLnBrk="0" fontAlgn="base" latinLnBrk="0" hangingPunct="0">
+              <a:lnSpc>
+                <a:spcPct val="100000"/>
+              </a:lnSpc>
+              <a:spcBef>
+                <a:spcPct val="0"/>
+              </a:spcBef>
+              <a:spcAft>
+                <a:spcPct val="0"/>
+              </a:spcAft>
+              <a:buClrTx/>
+              <a:buSzTx/>
+              <a:buNone/>
+              <a:tabLst/>
+            </a:pPr>
+            <a:r>
+              <a:rPr lang="en-US" altLang="en-US" sz="2000" dirty="0">
+                <a:solidFill>
+                  <a:schemeClr val="tx1"/>
+                </a:solidFill>
+                <a:latin typeface="Bahnschrift SemiCondensed" panose="020B0502040204020203" pitchFamily="34" charset="0"/>
+              </a:rPr>
+              <a:t> </a:t>
+            </a:r>
+            <a:r>
+              <a:rPr kumimoji="0" lang="en-US" altLang="en-US" sz="2000" b="0" i="0" u="none" strike="noStrike" cap="none" normalizeH="0" baseline="0" dirty="0">
+                <a:ln>
+                  <a:noFill/>
+                </a:ln>
+                <a:solidFill>
+                  <a:schemeClr val="tx1"/>
+                </a:solidFill>
+                <a:effectLst/>
+                <a:latin typeface="Bahnschrift SemiCondensed" panose="020B0502040204020203" pitchFamily="34" charset="0"/>
+              </a:rPr>
+              <a:t>high-quality data </a:t>
+            </a:r>
           </a:p>
         </p:txBody>
       </p:sp>
     </p:spTree>
     <p:extLst>
       <p:ext uri="{BB962C8B-B14F-4D97-AF65-F5344CB8AC3E}">
-        <p14:creationId xmlns:p14="http://schemas.microsoft.com/office/powerpoint/2010/main" val="2683520133"/>
+        <p14:creationId xmlns:p14="http://schemas.microsoft.com/office/powerpoint/2010/main" val="3013476488"/>
       </p:ext>
     </p:extLst>
   </p:cSld>
@@ -6431,285 +7017,6 @@
       </p:grpSpPr>
       <p:sp>
         <p:nvSpPr>
-          <p:cNvPr id="2" name="Title 1">
-            <a:extLst>
-              <a:ext uri="{FF2B5EF4-FFF2-40B4-BE49-F238E27FC236}">
-                <a16:creationId xmlns:a16="http://schemas.microsoft.com/office/drawing/2014/main" id="{CE29641B-50FF-B4AE-DC5B-7F8285DF8B5E}"/>
-              </a:ext>
-            </a:extLst>
-          </p:cNvPr>
-          <p:cNvSpPr>
-            <a:spLocks noGrp="1"/>
-          </p:cNvSpPr>
-          <p:nvPr>
-            <p:ph type="title"/>
-          </p:nvPr>
-        </p:nvSpPr>
-        <p:spPr/>
-        <p:txBody>
-          <a:bodyPr>
-            <a:noAutofit/>
-          </a:bodyPr>
-          <a:lstStyle/>
-          <a:p>
-            <a:r>
-              <a:rPr lang="en-US" sz="3200" dirty="0">
-                <a:latin typeface="Bahnschrift" panose="020B0502040204020203" pitchFamily="34" charset="0"/>
-              </a:rPr>
-              <a:t>Energy Consumption Prediction by Using Machine Learning for Smart Building: Case Study in Malaysia</a:t>
-            </a:r>
-            <a:endParaRPr lang="en-IN" sz="3200" dirty="0">
-              <a:latin typeface="Bahnschrift" panose="020B0502040204020203" pitchFamily="34" charset="0"/>
-            </a:endParaRPr>
-          </a:p>
-        </p:txBody>
-      </p:sp>
-      <p:pic>
-        <p:nvPicPr>
-          <p:cNvPr id="5" name="Content Placeholder 4" descr="Body builder with solid fill">
-            <a:extLst>
-              <a:ext uri="{FF2B5EF4-FFF2-40B4-BE49-F238E27FC236}">
-                <a16:creationId xmlns:a16="http://schemas.microsoft.com/office/drawing/2014/main" id="{1B89BED1-C506-3B71-B63A-EDB251F9F40F}"/>
-              </a:ext>
-            </a:extLst>
-          </p:cNvPr>
-          <p:cNvPicPr>
-            <a:picLocks noGrp="1" noChangeAspect="1"/>
-          </p:cNvPicPr>
-          <p:nvPr>
-            <p:ph idx="1"/>
-          </p:nvPr>
-        </p:nvPicPr>
-        <p:blipFill>
-          <a:blip r:embed="rId2">
-            <a:extLst>
-              <a:ext uri="{96DAC541-7B7A-43D3-8B79-37D633B846F1}">
-                <asvg:svgBlip xmlns:asvg="http://schemas.microsoft.com/office/drawing/2016/SVG/main" r:embed="rId3"/>
-              </a:ext>
-            </a:extLst>
-          </a:blip>
-          <a:stretch>
-            <a:fillRect/>
-          </a:stretch>
-        </p:blipFill>
-        <p:spPr>
-          <a:xfrm>
-            <a:off x="7731705" y="1110070"/>
-            <a:ext cx="914400" cy="914400"/>
-          </a:xfrm>
-        </p:spPr>
-      </p:pic>
-      <p:sp>
-        <p:nvSpPr>
-          <p:cNvPr id="8" name="TextBox 7">
-            <a:extLst>
-              <a:ext uri="{FF2B5EF4-FFF2-40B4-BE49-F238E27FC236}">
-                <a16:creationId xmlns:a16="http://schemas.microsoft.com/office/drawing/2014/main" id="{9EEEDF00-3C3F-D101-2FCC-C9051A9C1006}"/>
-              </a:ext>
-            </a:extLst>
-          </p:cNvPr>
-          <p:cNvSpPr txBox="1"/>
-          <p:nvPr/>
-        </p:nvSpPr>
-        <p:spPr>
-          <a:xfrm>
-            <a:off x="1176866" y="2517058"/>
-            <a:ext cx="7012039" cy="4524315"/>
-          </a:xfrm>
-          <a:prstGeom prst="rect">
-            <a:avLst/>
-          </a:prstGeom>
-          <a:noFill/>
-        </p:spPr>
-        <p:txBody>
-          <a:bodyPr wrap="square" rtlCol="0">
-            <a:spAutoFit/>
-          </a:bodyPr>
-          <a:lstStyle/>
-          <a:p>
-            <a:r>
-              <a:rPr lang="en-US" sz="2000" dirty="0">
-                <a:latin typeface="Bahnschrift SemiCondensed" panose="020B0502040204020203" pitchFamily="34" charset="0"/>
-              </a:rPr>
-              <a:t> Machine learning models can accurately predict electricity consumption in real smart building scenarios using historical data.</a:t>
-            </a:r>
-          </a:p>
-          <a:p>
-            <a:endParaRPr lang="en-US" sz="2000" dirty="0">
-              <a:latin typeface="Bahnschrift SemiCondensed" panose="020B0502040204020203" pitchFamily="34" charset="0"/>
-            </a:endParaRPr>
-          </a:p>
-          <a:p>
-            <a:r>
-              <a:rPr lang="en-US" sz="2000" dirty="0">
-                <a:latin typeface="Bahnschrift SemiCondensed" panose="020B0502040204020203" pitchFamily="34" charset="0"/>
-              </a:rPr>
-              <a:t> Energy usage patterns differ significantly between individual tenants, even within the same commercial building.</a:t>
-            </a:r>
-          </a:p>
-          <a:p>
-            <a:endParaRPr lang="en-US" sz="2000" dirty="0">
-              <a:latin typeface="Bahnschrift SemiCondensed" panose="020B0502040204020203" pitchFamily="34" charset="0"/>
-            </a:endParaRPr>
-          </a:p>
-          <a:p>
-            <a:r>
-              <a:rPr lang="en-US" sz="2000" dirty="0">
-                <a:latin typeface="Bahnschrift SemiCondensed" panose="020B0502040204020203" pitchFamily="34" charset="0"/>
-              </a:rPr>
-              <a:t> No single machine learning algorithm consistently outperforms others; </a:t>
-            </a:r>
-            <a:r>
-              <a:rPr lang="en-US" sz="2000" b="1" dirty="0">
-                <a:latin typeface="Bahnschrift SemiCondensed" panose="020B0502040204020203" pitchFamily="34" charset="0"/>
-              </a:rPr>
-              <a:t>model effectiveness depends on tenant behavior and load characteristics</a:t>
-            </a:r>
-            <a:r>
-              <a:rPr lang="en-US" sz="2000" dirty="0">
-                <a:latin typeface="Bahnschrift SemiCondensed" panose="020B0502040204020203" pitchFamily="34" charset="0"/>
-              </a:rPr>
-              <a:t>.</a:t>
-            </a:r>
-          </a:p>
-          <a:p>
-            <a:endParaRPr lang="en-US" sz="2000" dirty="0">
-              <a:latin typeface="Bahnschrift SemiCondensed" panose="020B0502040204020203" pitchFamily="34" charset="0"/>
-            </a:endParaRPr>
-          </a:p>
-          <a:p>
-            <a:r>
-              <a:rPr lang="en-US" sz="2000" dirty="0">
-                <a:latin typeface="Bahnschrift SemiCondensed" panose="020B0502040204020203" pitchFamily="34" charset="0"/>
-              </a:rPr>
-              <a:t> Proper data preprocessing (cleaning and normalization) plays a crucial role in improving prediction performance.</a:t>
-            </a:r>
-          </a:p>
-          <a:p>
-            <a:endParaRPr lang="en-US" sz="2400" dirty="0">
-              <a:latin typeface="Bahnschrift SemiCondensed" panose="020B0502040204020203" pitchFamily="34" charset="0"/>
-            </a:endParaRPr>
-          </a:p>
-          <a:p>
-            <a:endParaRPr lang="en-IN" sz="2400" dirty="0">
-              <a:latin typeface="Bahnschrift SemiCondensed" panose="020B0502040204020203" pitchFamily="34" charset="0"/>
-            </a:endParaRPr>
-          </a:p>
-        </p:txBody>
-      </p:sp>
-    </p:spTree>
-    <p:extLst>
-      <p:ext uri="{BB962C8B-B14F-4D97-AF65-F5344CB8AC3E}">
-        <p14:creationId xmlns:p14="http://schemas.microsoft.com/office/powerpoint/2010/main" val="722369955"/>
-      </p:ext>
-    </p:extLst>
-  </p:cSld>
-  <p:clrMapOvr>
-    <a:masterClrMapping/>
-  </p:clrMapOvr>
-</p:sld>
-</file>
-
-<file path=ppt/slides/slide14.xml><?xml version="1.0" encoding="utf-8"?>
-<p:sld xmlns:a="http://schemas.openxmlformats.org/drawingml/2006/main" xmlns:r="http://schemas.openxmlformats.org/officeDocument/2006/relationships" xmlns:p="http://schemas.openxmlformats.org/presentationml/2006/main">
-  <p:cSld>
-    <p:spTree>
-      <p:nvGrpSpPr>
-        <p:cNvPr id="1" name=""/>
-        <p:cNvGrpSpPr/>
-        <p:nvPr/>
-      </p:nvGrpSpPr>
-      <p:grpSpPr>
-        <a:xfrm>
-          <a:off x="0" y="0"/>
-          <a:ext cx="0" cy="0"/>
-          <a:chOff x="0" y="0"/>
-          <a:chExt cx="0" cy="0"/>
-        </a:xfrm>
-      </p:grpSpPr>
-      <p:sp>
-        <p:nvSpPr>
-          <p:cNvPr id="3" name="Content Placeholder 2">
-            <a:extLst>
-              <a:ext uri="{FF2B5EF4-FFF2-40B4-BE49-F238E27FC236}">
-                <a16:creationId xmlns:a16="http://schemas.microsoft.com/office/drawing/2014/main" id="{14E42765-0495-801B-C188-C82E08A3644F}"/>
-              </a:ext>
-            </a:extLst>
-          </p:cNvPr>
-          <p:cNvSpPr>
-            <a:spLocks noGrp="1"/>
-          </p:cNvSpPr>
-          <p:nvPr>
-            <p:ph idx="1"/>
-          </p:nvPr>
-        </p:nvSpPr>
-        <p:spPr/>
-        <p:txBody>
-          <a:bodyPr>
-            <a:normAutofit/>
-          </a:bodyPr>
-          <a:lstStyle/>
-          <a:p>
-            <a:r>
-              <a:rPr lang="en-US" sz="2000" dirty="0">
-                <a:latin typeface="Bahnschrift SemiCondensed" panose="020B0502040204020203" pitchFamily="34" charset="0"/>
-              </a:rPr>
-              <a:t>Cloud-based tools such as Microsoft Azure Machine Learning Studio are suitable for implementing scalable energy prediction systems</a:t>
-            </a:r>
-          </a:p>
-          <a:p>
-            <a:r>
-              <a:rPr lang="en-US" sz="2000" dirty="0">
-                <a:latin typeface="Bahnschrift SemiCondensed" panose="020B0502040204020203" pitchFamily="34" charset="0"/>
-              </a:rPr>
-              <a:t>Evaluation metrics like RMSE, NRMSE, and MAPE provide reliable measures for assessing prediction accuracy.</a:t>
-            </a:r>
-          </a:p>
-          <a:p>
-            <a:r>
-              <a:rPr lang="en-US" sz="2000" dirty="0">
-                <a:latin typeface="Bahnschrift SemiCondensed" panose="020B0502040204020203" pitchFamily="34" charset="0"/>
-              </a:rPr>
-              <a:t>Accurate energy forecasting supports energy efficiency and informed decision-making in smart building management.</a:t>
-            </a:r>
-            <a:endParaRPr lang="en-IN" sz="2000" dirty="0">
-              <a:latin typeface="Bahnschrift SemiCondensed" panose="020B0502040204020203" pitchFamily="34" charset="0"/>
-            </a:endParaRPr>
-          </a:p>
-        </p:txBody>
-      </p:sp>
-    </p:spTree>
-    <p:extLst>
-      <p:ext uri="{BB962C8B-B14F-4D97-AF65-F5344CB8AC3E}">
-        <p14:creationId xmlns:p14="http://schemas.microsoft.com/office/powerpoint/2010/main" val="972607472"/>
-      </p:ext>
-    </p:extLst>
-  </p:cSld>
-  <p:clrMapOvr>
-    <a:masterClrMapping/>
-  </p:clrMapOvr>
-</p:sld>
-</file>
-
-<file path=ppt/slides/slide15.xml><?xml version="1.0" encoding="utf-8"?>
-<p:sld xmlns:a="http://schemas.openxmlformats.org/drawingml/2006/main" xmlns:r="http://schemas.openxmlformats.org/officeDocument/2006/relationships" xmlns:p="http://schemas.openxmlformats.org/presentationml/2006/main">
-  <p:cSld>
-    <p:spTree>
-      <p:nvGrpSpPr>
-        <p:cNvPr id="1" name=""/>
-        <p:cNvGrpSpPr/>
-        <p:nvPr/>
-      </p:nvGrpSpPr>
-      <p:grpSpPr>
-        <a:xfrm>
-          <a:off x="0" y="0"/>
-          <a:ext cx="0" cy="0"/>
-          <a:chOff x="0" y="0"/>
-          <a:chExt cx="0" cy="0"/>
-        </a:xfrm>
-      </p:grpSpPr>
-      <p:sp>
-        <p:nvSpPr>
           <p:cNvPr id="2" name="Title 1"/>
           <p:cNvSpPr>
             <a:spLocks noGrp="1"/>
@@ -6805,10 +7112,10 @@
           <p:nvPr/>
         </p:nvPicPr>
         <p:blipFill>
-          <a:blip r:embed="rId2">
+          <a:blip>
             <a:extLst>
               <a:ext uri="{96DAC541-7B7A-43D3-8B79-37D633B846F1}">
-                <asvg:svgBlip xmlns:asvg="http://schemas.microsoft.com/office/drawing/2016/SVG/main" r:embed="rId3"/>
+                <asvg:svgBlip xmlns:asvg="http://schemas.microsoft.com/office/drawing/2016/SVG/main" r:embed="rId2"/>
               </a:ext>
             </a:extLst>
           </a:blip>
@@ -6834,7 +7141,7 @@
 </p:sld>
 </file>
 
-<file path=ppt/slides/slide16.xml><?xml version="1.0" encoding="utf-8"?>
+<file path=ppt/slides/slide14.xml><?xml version="1.0" encoding="utf-8"?>
 <p:sld xmlns:a="http://schemas.openxmlformats.org/drawingml/2006/main" xmlns:r="http://schemas.openxmlformats.org/officeDocument/2006/relationships" xmlns:p="http://schemas.openxmlformats.org/presentationml/2006/main">
   <p:cSld>
     <p:spTree>
@@ -7164,10 +7471,10 @@
           <p:nvPr/>
         </p:nvPicPr>
         <p:blipFill>
-          <a:blip r:embed="rId2">
+          <a:blip>
             <a:extLst>
               <a:ext uri="{96DAC541-7B7A-43D3-8B79-37D633B846F1}">
-                <asvg:svgBlip xmlns:asvg="http://schemas.microsoft.com/office/drawing/2016/SVG/main" r:embed="rId3"/>
+                <asvg:svgBlip xmlns:asvg="http://schemas.microsoft.com/office/drawing/2016/SVG/main" r:embed="rId2"/>
               </a:ext>
             </a:extLst>
           </a:blip>
@@ -7282,10 +7589,10 @@
           <p:nvPr/>
         </p:nvPicPr>
         <p:blipFill>
-          <a:blip r:embed="rId3">
+          <a:blip>
             <a:extLst>
               <a:ext uri="{96DAC541-7B7A-43D3-8B79-37D633B846F1}">
-                <asvg:svgBlip xmlns:asvg="http://schemas.microsoft.com/office/drawing/2016/SVG/main" r:embed="rId4"/>
+                <asvg:svgBlip xmlns:asvg="http://schemas.microsoft.com/office/drawing/2016/SVG/main" r:embed="rId3"/>
               </a:ext>
             </a:extLst>
           </a:blip>
@@ -7340,26 +7647,15 @@
         </p:nvSpPr>
         <p:spPr/>
         <p:txBody>
-          <a:bodyPr>
-            <a:normAutofit/>
-          </a:bodyPr>
+          <a:bodyPr/>
           <a:lstStyle/>
           <a:p>
             <a:r>
               <a:rPr dirty="0">
                 <a:latin typeface="Bahnschrift" panose="020B0502040204020203" pitchFamily="34" charset="0"/>
               </a:rPr>
-              <a:t>Literature Review</a:t>
-            </a:r>
-            <a:r>
-              <a:rPr lang="en-IN" dirty="0">
-                <a:latin typeface="Bahnschrift" panose="020B0502040204020203" pitchFamily="34" charset="0"/>
-              </a:rPr>
-              <a:t> </a:t>
-            </a:r>
-            <a:endParaRPr dirty="0">
-              <a:latin typeface="Bahnschrift" panose="020B0502040204020203" pitchFamily="34" charset="0"/>
-            </a:endParaRPr>
+              <a:t>Problem Statement</a:t>
+            </a:r>
           </a:p>
         </p:txBody>
       </p:sp>
@@ -7375,16 +7671,14 @@
         </p:nvSpPr>
         <p:spPr/>
         <p:txBody>
-          <a:bodyPr>
-            <a:normAutofit lnSpcReduction="10000"/>
-          </a:bodyPr>
+          <a:bodyPr/>
           <a:lstStyle/>
           <a:p>
             <a:r>
               <a:rPr lang="en-US" dirty="0">
                 <a:latin typeface="Bahnschrift SemiCondensed" panose="020B0502040204020203" pitchFamily="34" charset="0"/>
               </a:rPr>
-              <a:t> Studies show that ensemble models like Random Forest (85% accuracy) consistently outperform simpler baselines such as Linear Regression in energy prediction tasks (Raza et al., 2019).</a:t>
+              <a:t>Inefficient energy consumption in residential settings, often due to a lack of real-time oversight, results in substantial energy waste and elevated financial burdens on households.</a:t>
             </a:r>
           </a:p>
           <a:p>
@@ -7392,22 +7686,26 @@
               <a:rPr lang="en-US" dirty="0">
                 <a:latin typeface="Bahnschrift SemiCondensed" panose="020B0502040204020203" pitchFamily="34" charset="0"/>
               </a:rPr>
-              <a:t>The application of Deep Learning architectures, particularly Long Short-Term Memory (LSTM) networks, further boosts performance, achieving accuracies between 90-93% by effectively modeling time-series data (Mocanu et al., 2016).</a:t>
-            </a:r>
-          </a:p>
-          <a:p>
+              <a:t>Implementing a predictive system to forecast daily consumption based on user activity is essential for empowering homeowners to optimize their energy usage and reduce costs</a:t>
+            </a:r>
+            <a:r>
+              <a:rPr lang="en-US" dirty="0">
+                <a:latin typeface="Bahnschrift SemiLight" panose="020B0502040204020203" pitchFamily="34" charset="0"/>
+              </a:rPr>
+              <a:t>.</a:t>
+            </a:r>
             <a:endParaRPr dirty="0">
-              <a:latin typeface="Bahnschrift SemiCondensed" panose="020B0502040204020203" pitchFamily="34" charset="0"/>
+              <a:latin typeface="Bahnschrift SemiLight" panose="020B0502040204020203" pitchFamily="34" charset="0"/>
             </a:endParaRPr>
           </a:p>
         </p:txBody>
       </p:sp>
       <p:pic>
         <p:nvPicPr>
-          <p:cNvPr id="5" name="Graphic 4" descr="Books with solid fill">
+          <p:cNvPr id="9" name="Graphic 8" descr="Help with solid fill">
             <a:extLst>
               <a:ext uri="{FF2B5EF4-FFF2-40B4-BE49-F238E27FC236}">
-                <a16:creationId xmlns:a16="http://schemas.microsoft.com/office/drawing/2014/main" id="{50A4EC1B-2BE3-4B6C-8088-AA4D8591C1B6}"/>
+                <a16:creationId xmlns:a16="http://schemas.microsoft.com/office/drawing/2014/main" id="{DCCAD396-CE40-7047-6990-928F390646BF}"/>
               </a:ext>
             </a:extLst>
           </p:cNvPr>
@@ -7417,10 +7715,10 @@
           <p:nvPr/>
         </p:nvPicPr>
         <p:blipFill>
-          <a:blip r:embed="rId2">
+          <a:blip>
             <a:extLst>
               <a:ext uri="{96DAC541-7B7A-43D3-8B79-37D633B846F1}">
-                <asvg:svgBlip xmlns:asvg="http://schemas.microsoft.com/office/drawing/2016/SVG/main" r:embed="rId3"/>
+                <asvg:svgBlip xmlns:asvg="http://schemas.microsoft.com/office/drawing/2016/SVG/main" r:embed="rId2"/>
               </a:ext>
             </a:extLst>
           </a:blip>
@@ -7430,8 +7728,8 @@
         </p:blipFill>
         <p:spPr>
           <a:xfrm>
-            <a:off x="6712527" y="1110070"/>
-            <a:ext cx="914400" cy="914400"/>
+            <a:off x="6826827" y="1193197"/>
+            <a:ext cx="789709" cy="789709"/>
           </a:xfrm>
           <a:prstGeom prst="rect">
             <a:avLst/>
@@ -7465,6 +7763,429 @@
       </p:grpSpPr>
       <p:sp>
         <p:nvSpPr>
+          <p:cNvPr id="2" name="Title 1"/>
+          <p:cNvSpPr>
+            <a:spLocks noGrp="1"/>
+          </p:cNvSpPr>
+          <p:nvPr>
+            <p:ph type="title"/>
+          </p:nvPr>
+        </p:nvSpPr>
+        <p:spPr/>
+        <p:txBody>
+          <a:bodyPr/>
+          <a:lstStyle/>
+          <a:p>
+            <a:r>
+              <a:rPr dirty="0">
+                <a:latin typeface="Bahnschrift" panose="020B0502040204020203" pitchFamily="34" charset="0"/>
+              </a:rPr>
+              <a:t>Proposed Solution</a:t>
+            </a:r>
+          </a:p>
+        </p:txBody>
+      </p:sp>
+      <p:sp>
+        <p:nvSpPr>
+          <p:cNvPr id="3" name="Content Placeholder 2"/>
+          <p:cNvSpPr>
+            <a:spLocks noGrp="1"/>
+          </p:cNvSpPr>
+          <p:nvPr>
+            <p:ph idx="1"/>
+          </p:nvPr>
+        </p:nvSpPr>
+        <p:spPr/>
+        <p:txBody>
+          <a:bodyPr>
+            <a:normAutofit fontScale="92500"/>
+          </a:bodyPr>
+          <a:lstStyle/>
+          <a:p>
+            <a:r>
+              <a:rPr lang="en-US" dirty="0">
+                <a:latin typeface="Bahnschrift SemiCondensed" panose="020B0502040204020203" pitchFamily="34" charset="0"/>
+              </a:rPr>
+              <a:t>1. </a:t>
+            </a:r>
+            <a:r>
+              <a:rPr lang="en-US" b="1" u="sng" dirty="0">
+                <a:latin typeface="Bahnschrift SemiCondensed" panose="020B0502040204020203" pitchFamily="34" charset="0"/>
+              </a:rPr>
+              <a:t>Data Acquisition</a:t>
+            </a:r>
+            <a:r>
+              <a:rPr lang="en-US" dirty="0">
+                <a:latin typeface="Bahnschrift SemiCondensed" panose="020B0502040204020203" pitchFamily="34" charset="0"/>
+              </a:rPr>
+              <a:t>: Collect granular energy consumption data from smart meters and individual appliances.</a:t>
+            </a:r>
+          </a:p>
+          <a:p>
+            <a:r>
+              <a:rPr lang="en-US" dirty="0">
+                <a:latin typeface="Bahnschrift SemiCondensed" panose="020B0502040204020203" pitchFamily="34" charset="0"/>
+              </a:rPr>
+              <a:t>2</a:t>
+            </a:r>
+            <a:r>
+              <a:rPr lang="en-US" b="1" u="sng" dirty="0">
+                <a:latin typeface="Bahnschrift SemiCondensed" panose="020B0502040204020203" pitchFamily="34" charset="0"/>
+              </a:rPr>
+              <a:t>. Data Preprocessing</a:t>
+            </a:r>
+            <a:r>
+              <a:rPr lang="en-US" dirty="0">
+                <a:latin typeface="Bahnschrift SemiCondensed" panose="020B0502040204020203" pitchFamily="34" charset="0"/>
+              </a:rPr>
+              <a:t>: Cleanse the dataset by addressing missing values and outliers, followed by normalization to scale features for model compatibility.</a:t>
+            </a:r>
+          </a:p>
+          <a:p>
+            <a:r>
+              <a:rPr lang="en-US" dirty="0">
+                <a:latin typeface="Bahnschrift SemiCondensed" panose="020B0502040204020203" pitchFamily="34" charset="0"/>
+              </a:rPr>
+              <a:t>3</a:t>
+            </a:r>
+            <a:r>
+              <a:rPr lang="en-US" b="1" u="sng" dirty="0">
+                <a:latin typeface="Bahnschrift SemiCondensed" panose="020B0502040204020203" pitchFamily="34" charset="0"/>
+              </a:rPr>
+              <a:t>. Feature Engineering</a:t>
+            </a:r>
+            <a:r>
+              <a:rPr lang="en-US" dirty="0">
+                <a:latin typeface="Bahnschrift SemiCondensed" panose="020B0502040204020203" pitchFamily="34" charset="0"/>
+              </a:rPr>
+              <a:t>: Enrich the dataset by integrating external variables such as meteorological data, temporal features (e.g., time of day, day of week), and user activity patterns.</a:t>
+            </a:r>
+            <a:endParaRPr dirty="0">
+              <a:latin typeface="Bahnschrift SemiCondensed" panose="020B0502040204020203" pitchFamily="34" charset="0"/>
+            </a:endParaRPr>
+          </a:p>
+        </p:txBody>
+      </p:sp>
+      <p:pic>
+        <p:nvPicPr>
+          <p:cNvPr id="5" name="Graphic 4" descr="Research with solid fill">
+            <a:extLst>
+              <a:ext uri="{FF2B5EF4-FFF2-40B4-BE49-F238E27FC236}">
+                <a16:creationId xmlns:a16="http://schemas.microsoft.com/office/drawing/2014/main" id="{4BFC9F9E-6C80-DFC2-6C4E-76EFB84236DB}"/>
+              </a:ext>
+            </a:extLst>
+          </p:cNvPr>
+          <p:cNvPicPr>
+            <a:picLocks noChangeAspect="1"/>
+          </p:cNvPicPr>
+          <p:nvPr/>
+        </p:nvPicPr>
+        <p:blipFill>
+          <a:blip>
+            <a:extLst>
+              <a:ext uri="{96DAC541-7B7A-43D3-8B79-37D633B846F1}">
+                <asvg:svgBlip xmlns:asvg="http://schemas.microsoft.com/office/drawing/2016/SVG/main" r:embed="rId2"/>
+              </a:ext>
+            </a:extLst>
+          </a:blip>
+          <a:stretch>
+            <a:fillRect/>
+          </a:stretch>
+        </p:blipFill>
+        <p:spPr>
+          <a:xfrm>
+            <a:off x="6598227" y="1110070"/>
+            <a:ext cx="914400" cy="914400"/>
+          </a:xfrm>
+          <a:prstGeom prst="rect">
+            <a:avLst/>
+          </a:prstGeom>
+        </p:spPr>
+      </p:pic>
+    </p:spTree>
+  </p:cSld>
+  <p:clrMapOvr>
+    <a:masterClrMapping/>
+  </p:clrMapOvr>
+</p:sld>
+</file>
+
+<file path=ppt/slides/slide7.xml><?xml version="1.0" encoding="utf-8"?>
+<p:sld xmlns:a="http://schemas.openxmlformats.org/drawingml/2006/main" xmlns:r="http://schemas.openxmlformats.org/officeDocument/2006/relationships" xmlns:p="http://schemas.openxmlformats.org/presentationml/2006/main">
+  <p:cSld>
+    <p:spTree>
+      <p:nvGrpSpPr>
+        <p:cNvPr id="1" name=""/>
+        <p:cNvGrpSpPr/>
+        <p:nvPr/>
+      </p:nvGrpSpPr>
+      <p:grpSpPr>
+        <a:xfrm>
+          <a:off x="0" y="0"/>
+          <a:ext cx="0" cy="0"/>
+          <a:chOff x="0" y="0"/>
+          <a:chExt cx="0" cy="0"/>
+        </a:xfrm>
+      </p:grpSpPr>
+      <p:sp>
+        <p:nvSpPr>
+          <p:cNvPr id="3" name="Content Placeholder 2">
+            <a:extLst>
+              <a:ext uri="{FF2B5EF4-FFF2-40B4-BE49-F238E27FC236}">
+                <a16:creationId xmlns:a16="http://schemas.microsoft.com/office/drawing/2014/main" id="{9B4689EC-2AFA-E963-CEED-61F7844D0B0D}"/>
+              </a:ext>
+            </a:extLst>
+          </p:cNvPr>
+          <p:cNvSpPr>
+            <a:spLocks noGrp="1"/>
+          </p:cNvSpPr>
+          <p:nvPr>
+            <p:ph idx="1"/>
+          </p:nvPr>
+        </p:nvSpPr>
+        <p:spPr>
+          <a:xfrm>
+            <a:off x="1070264" y="800101"/>
+            <a:ext cx="6905337" cy="5135032"/>
+          </a:xfrm>
+        </p:spPr>
+        <p:txBody>
+          <a:bodyPr/>
+          <a:lstStyle/>
+          <a:p>
+            <a:r>
+              <a:rPr lang="en-US" dirty="0">
+                <a:latin typeface="Bahnschrift SemiCondensed" panose="020B0502040204020203" pitchFamily="34" charset="0"/>
+              </a:rPr>
+              <a:t>4. </a:t>
+            </a:r>
+            <a:r>
+              <a:rPr lang="en-US" b="1" u="sng" dirty="0">
+                <a:latin typeface="Bahnschrift SemiCondensed" panose="020B0502040204020203" pitchFamily="34" charset="0"/>
+              </a:rPr>
+              <a:t>Predictive Modeling</a:t>
+            </a:r>
+            <a:r>
+              <a:rPr lang="en-US" dirty="0">
+                <a:latin typeface="Bahnschrift SemiCondensed" panose="020B0502040204020203" pitchFamily="34" charset="0"/>
+              </a:rPr>
+              <a:t>: Train and evaluate machine learning models, such as Random Forest and Long Short-Term Memory (LSTM) networks, to capture consumption patterns and dependencies.</a:t>
+            </a:r>
+          </a:p>
+          <a:p>
+            <a:r>
+              <a:rPr lang="en-US" dirty="0">
+                <a:latin typeface="Bahnschrift SemiCondensed" panose="020B0502040204020203" pitchFamily="34" charset="0"/>
+              </a:rPr>
+              <a:t>5. </a:t>
+            </a:r>
+            <a:r>
+              <a:rPr lang="en-US" b="1" u="sng" dirty="0">
+                <a:latin typeface="Bahnschrift SemiCondensed" panose="020B0502040204020203" pitchFamily="34" charset="0"/>
+              </a:rPr>
+              <a:t>Forecasting and Optimization</a:t>
+            </a:r>
+            <a:r>
+              <a:rPr lang="en-US" dirty="0">
+                <a:latin typeface="Bahnschrift SemiCondensed" panose="020B0502040204020203" pitchFamily="34" charset="0"/>
+              </a:rPr>
+              <a:t>: Generate daily energy usage predictions and provide actionable recommendations to improve energy efficiency and reduce costs.</a:t>
+            </a:r>
+          </a:p>
+          <a:p>
+            <a:r>
+              <a:rPr lang="en-US" dirty="0">
+                <a:latin typeface="Bahnschrift SemiCondensed" panose="020B0502040204020203" pitchFamily="34" charset="0"/>
+              </a:rPr>
+              <a:t>6</a:t>
+            </a:r>
+            <a:r>
+              <a:rPr lang="en-US" b="1" u="sng" dirty="0">
+                <a:latin typeface="Bahnschrift SemiCondensed" panose="020B0502040204020203" pitchFamily="34" charset="0"/>
+              </a:rPr>
+              <a:t>. Deployment and Monitoring</a:t>
+            </a:r>
+            <a:r>
+              <a:rPr lang="en-US" dirty="0">
+                <a:latin typeface="Bahnschrift SemiCondensed" panose="020B0502040204020203" pitchFamily="34" charset="0"/>
+              </a:rPr>
+              <a:t>: Deploy the finalized model into a live environment and continuously monitor its performance, retraining as necessary to adapt to new data and consumption patterns</a:t>
+            </a:r>
+            <a:r>
+              <a:rPr lang="en-US" dirty="0"/>
+              <a:t>.</a:t>
+            </a:r>
+            <a:endParaRPr lang="en-IN" dirty="0"/>
+          </a:p>
+        </p:txBody>
+      </p:sp>
+    </p:spTree>
+    <p:extLst>
+      <p:ext uri="{BB962C8B-B14F-4D97-AF65-F5344CB8AC3E}">
+        <p14:creationId xmlns:p14="http://schemas.microsoft.com/office/powerpoint/2010/main" val="4104507145"/>
+      </p:ext>
+    </p:extLst>
+  </p:cSld>
+  <p:clrMapOvr>
+    <a:masterClrMapping/>
+  </p:clrMapOvr>
+</p:sld>
+</file>
+
+<file path=ppt/slides/slide8.xml><?xml version="1.0" encoding="utf-8"?>
+<p:sld xmlns:a="http://schemas.openxmlformats.org/drawingml/2006/main" xmlns:r="http://schemas.openxmlformats.org/officeDocument/2006/relationships" xmlns:p="http://schemas.openxmlformats.org/presentationml/2006/main">
+  <p:cSld>
+    <p:spTree>
+      <p:nvGrpSpPr>
+        <p:cNvPr id="1" name=""/>
+        <p:cNvGrpSpPr/>
+        <p:nvPr/>
+      </p:nvGrpSpPr>
+      <p:grpSpPr>
+        <a:xfrm>
+          <a:off x="0" y="0"/>
+          <a:ext cx="0" cy="0"/>
+          <a:chOff x="0" y="0"/>
+          <a:chExt cx="0" cy="0"/>
+        </a:xfrm>
+      </p:grpSpPr>
+      <p:sp>
+        <p:nvSpPr>
+          <p:cNvPr id="2" name="Title 1"/>
+          <p:cNvSpPr>
+            <a:spLocks noGrp="1"/>
+          </p:cNvSpPr>
+          <p:nvPr>
+            <p:ph type="title"/>
+          </p:nvPr>
+        </p:nvSpPr>
+        <p:spPr/>
+        <p:txBody>
+          <a:bodyPr>
+            <a:normAutofit/>
+          </a:bodyPr>
+          <a:lstStyle/>
+          <a:p>
+            <a:r>
+              <a:rPr dirty="0">
+                <a:latin typeface="Bahnschrift" panose="020B0502040204020203" pitchFamily="34" charset="0"/>
+              </a:rPr>
+              <a:t>Literature Review</a:t>
+            </a:r>
+            <a:r>
+              <a:rPr lang="en-IN" dirty="0">
+                <a:latin typeface="Bahnschrift" panose="020B0502040204020203" pitchFamily="34" charset="0"/>
+              </a:rPr>
+              <a:t> </a:t>
+            </a:r>
+            <a:endParaRPr dirty="0">
+              <a:latin typeface="Bahnschrift" panose="020B0502040204020203" pitchFamily="34" charset="0"/>
+            </a:endParaRPr>
+          </a:p>
+        </p:txBody>
+      </p:sp>
+      <p:sp>
+        <p:nvSpPr>
+          <p:cNvPr id="3" name="Content Placeholder 2"/>
+          <p:cNvSpPr>
+            <a:spLocks noGrp="1"/>
+          </p:cNvSpPr>
+          <p:nvPr>
+            <p:ph idx="1"/>
+          </p:nvPr>
+        </p:nvSpPr>
+        <p:spPr/>
+        <p:txBody>
+          <a:bodyPr>
+            <a:normAutofit lnSpcReduction="10000"/>
+          </a:bodyPr>
+          <a:lstStyle/>
+          <a:p>
+            <a:r>
+              <a:rPr lang="en-US" dirty="0">
+                <a:latin typeface="Bahnschrift SemiCondensed" panose="020B0502040204020203" pitchFamily="34" charset="0"/>
+              </a:rPr>
+              <a:t> Studies show that ensemble models like Random Forest (85% accuracy) consistently outperform simpler baselines such as Linear Regression in energy prediction tasks (Raza et al., 2019).</a:t>
+            </a:r>
+          </a:p>
+          <a:p>
+            <a:r>
+              <a:rPr lang="en-US" dirty="0">
+                <a:latin typeface="Bahnschrift SemiCondensed" panose="020B0502040204020203" pitchFamily="34" charset="0"/>
+              </a:rPr>
+              <a:t>The application of Deep Learning architectures, particularly Long Short-Term Memory (LSTM) networks, further boosts performance, achieving accuracies between 90-93% by effectively modeling time-series data (Mocanu et al., 2016).</a:t>
+            </a:r>
+          </a:p>
+          <a:p>
+            <a:endParaRPr dirty="0">
+              <a:latin typeface="Bahnschrift SemiCondensed" panose="020B0502040204020203" pitchFamily="34" charset="0"/>
+            </a:endParaRPr>
+          </a:p>
+        </p:txBody>
+      </p:sp>
+      <p:pic>
+        <p:nvPicPr>
+          <p:cNvPr id="5" name="Graphic 4" descr="Books with solid fill">
+            <a:extLst>
+              <a:ext uri="{FF2B5EF4-FFF2-40B4-BE49-F238E27FC236}">
+                <a16:creationId xmlns:a16="http://schemas.microsoft.com/office/drawing/2014/main" id="{50A4EC1B-2BE3-4B6C-8088-AA4D8591C1B6}"/>
+              </a:ext>
+            </a:extLst>
+          </p:cNvPr>
+          <p:cNvPicPr>
+            <a:picLocks noChangeAspect="1"/>
+          </p:cNvPicPr>
+          <p:nvPr/>
+        </p:nvPicPr>
+        <p:blipFill>
+          <a:blip>
+            <a:extLst>
+              <a:ext uri="{96DAC541-7B7A-43D3-8B79-37D633B846F1}">
+                <asvg:svgBlip xmlns:asvg="http://schemas.microsoft.com/office/drawing/2016/SVG/main" r:embed="rId2"/>
+              </a:ext>
+            </a:extLst>
+          </a:blip>
+          <a:stretch>
+            <a:fillRect/>
+          </a:stretch>
+        </p:blipFill>
+        <p:spPr>
+          <a:xfrm>
+            <a:off x="6712527" y="1110070"/>
+            <a:ext cx="914400" cy="914400"/>
+          </a:xfrm>
+          <a:prstGeom prst="rect">
+            <a:avLst/>
+          </a:prstGeom>
+        </p:spPr>
+      </p:pic>
+    </p:spTree>
+  </p:cSld>
+  <p:clrMapOvr>
+    <a:masterClrMapping/>
+  </p:clrMapOvr>
+</p:sld>
+</file>
+
+<file path=ppt/slides/slide9.xml><?xml version="1.0" encoding="utf-8"?>
+<p:sld xmlns:a="http://schemas.openxmlformats.org/drawingml/2006/main" xmlns:r="http://schemas.openxmlformats.org/officeDocument/2006/relationships" xmlns:p="http://schemas.openxmlformats.org/presentationml/2006/main">
+  <p:cSld>
+    <p:spTree>
+      <p:nvGrpSpPr>
+        <p:cNvPr id="1" name=""/>
+        <p:cNvGrpSpPr/>
+        <p:nvPr/>
+      </p:nvGrpSpPr>
+      <p:grpSpPr>
+        <a:xfrm>
+          <a:off x="0" y="0"/>
+          <a:ext cx="0" cy="0"/>
+          <a:chOff x="0" y="0"/>
+          <a:chExt cx="0" cy="0"/>
+        </a:xfrm>
+      </p:grpSpPr>
+      <p:sp>
+        <p:nvSpPr>
           <p:cNvPr id="3" name="Content Placeholder 2">
             <a:extLst>
               <a:ext uri="{FF2B5EF4-FFF2-40B4-BE49-F238E27FC236}">
@@ -7517,10 +8238,10 @@
           <p:nvPr/>
         </p:nvPicPr>
         <p:blipFill>
-          <a:blip r:embed="rId2">
+          <a:blip>
             <a:extLst>
               <a:ext uri="{96DAC541-7B7A-43D3-8B79-37D633B846F1}">
-                <asvg:svgBlip xmlns:asvg="http://schemas.microsoft.com/office/drawing/2016/SVG/main" r:embed="rId3"/>
+                <asvg:svgBlip xmlns:asvg="http://schemas.microsoft.com/office/drawing/2016/SVG/main" r:embed="rId2"/>
               </a:ext>
             </a:extLst>
           </a:blip>
@@ -7553,10 +8274,10 @@
           <p:nvPr/>
         </p:nvPicPr>
         <p:blipFill>
-          <a:blip r:embed="rId4">
+          <a:blip>
             <a:extLst>
               <a:ext uri="{96DAC541-7B7A-43D3-8B79-37D633B846F1}">
-                <asvg:svgBlip xmlns:asvg="http://schemas.microsoft.com/office/drawing/2016/SVG/main" r:embed="rId5"/>
+                <asvg:svgBlip xmlns:asvg="http://schemas.microsoft.com/office/drawing/2016/SVG/main" r:embed="rId3"/>
               </a:ext>
             </a:extLst>
           </a:blip>
@@ -7578,420 +8299,6 @@
     <p:extLst>
       <p:ext uri="{BB962C8B-B14F-4D97-AF65-F5344CB8AC3E}">
         <p14:creationId xmlns:p14="http://schemas.microsoft.com/office/powerpoint/2010/main" val="659956525"/>
-      </p:ext>
-    </p:extLst>
-  </p:cSld>
-  <p:clrMapOvr>
-    <a:masterClrMapping/>
-  </p:clrMapOvr>
-</p:sld>
-</file>
-
-<file path=ppt/slides/slide7.xml><?xml version="1.0" encoding="utf-8"?>
-<p:sld xmlns:a="http://schemas.openxmlformats.org/drawingml/2006/main" xmlns:r="http://schemas.openxmlformats.org/officeDocument/2006/relationships" xmlns:p="http://schemas.openxmlformats.org/presentationml/2006/main">
-  <p:cSld>
-    <p:spTree>
-      <p:nvGrpSpPr>
-        <p:cNvPr id="1" name=""/>
-        <p:cNvGrpSpPr/>
-        <p:nvPr/>
-      </p:nvGrpSpPr>
-      <p:grpSpPr>
-        <a:xfrm>
-          <a:off x="0" y="0"/>
-          <a:ext cx="0" cy="0"/>
-          <a:chOff x="0" y="0"/>
-          <a:chExt cx="0" cy="0"/>
-        </a:xfrm>
-      </p:grpSpPr>
-      <p:sp>
-        <p:nvSpPr>
-          <p:cNvPr id="2" name="Title 1"/>
-          <p:cNvSpPr>
-            <a:spLocks noGrp="1"/>
-          </p:cNvSpPr>
-          <p:nvPr>
-            <p:ph type="title"/>
-          </p:nvPr>
-        </p:nvSpPr>
-        <p:spPr/>
-        <p:txBody>
-          <a:bodyPr/>
-          <a:lstStyle/>
-          <a:p>
-            <a:r>
-              <a:rPr dirty="0">
-                <a:latin typeface="Bahnschrift" panose="020B0502040204020203" pitchFamily="34" charset="0"/>
-              </a:rPr>
-              <a:t>Problem Statement</a:t>
-            </a:r>
-          </a:p>
-        </p:txBody>
-      </p:sp>
-      <p:sp>
-        <p:nvSpPr>
-          <p:cNvPr id="3" name="Content Placeholder 2"/>
-          <p:cNvSpPr>
-            <a:spLocks noGrp="1"/>
-          </p:cNvSpPr>
-          <p:nvPr>
-            <p:ph idx="1"/>
-          </p:nvPr>
-        </p:nvSpPr>
-        <p:spPr/>
-        <p:txBody>
-          <a:bodyPr/>
-          <a:lstStyle/>
-          <a:p>
-            <a:r>
-              <a:rPr lang="en-US" dirty="0">
-                <a:latin typeface="Bahnschrift SemiCondensed" panose="020B0502040204020203" pitchFamily="34" charset="0"/>
-              </a:rPr>
-              <a:t>Inefficient energy consumption in residential settings, often due to a lack of real-time oversight, results in substantial energy waste and elevated financial burdens on households.</a:t>
-            </a:r>
-          </a:p>
-          <a:p>
-            <a:r>
-              <a:rPr lang="en-US" dirty="0">
-                <a:latin typeface="Bahnschrift SemiCondensed" panose="020B0502040204020203" pitchFamily="34" charset="0"/>
-              </a:rPr>
-              <a:t>Implementing a predictive system to forecast daily consumption based on user activity is essential for empowering homeowners to optimize their energy usage and reduce costs</a:t>
-            </a:r>
-            <a:r>
-              <a:rPr lang="en-US" dirty="0">
-                <a:latin typeface="Bahnschrift SemiLight" panose="020B0502040204020203" pitchFamily="34" charset="0"/>
-              </a:rPr>
-              <a:t>.</a:t>
-            </a:r>
-            <a:endParaRPr dirty="0">
-              <a:latin typeface="Bahnschrift SemiLight" panose="020B0502040204020203" pitchFamily="34" charset="0"/>
-            </a:endParaRPr>
-          </a:p>
-        </p:txBody>
-      </p:sp>
-      <p:pic>
-        <p:nvPicPr>
-          <p:cNvPr id="9" name="Graphic 8" descr="Help with solid fill">
-            <a:extLst>
-              <a:ext uri="{FF2B5EF4-FFF2-40B4-BE49-F238E27FC236}">
-                <a16:creationId xmlns:a16="http://schemas.microsoft.com/office/drawing/2014/main" id="{DCCAD396-CE40-7047-6990-928F390646BF}"/>
-              </a:ext>
-            </a:extLst>
-          </p:cNvPr>
-          <p:cNvPicPr>
-            <a:picLocks noChangeAspect="1"/>
-          </p:cNvPicPr>
-          <p:nvPr/>
-        </p:nvPicPr>
-        <p:blipFill>
-          <a:blip r:embed="rId2">
-            <a:extLst>
-              <a:ext uri="{96DAC541-7B7A-43D3-8B79-37D633B846F1}">
-                <asvg:svgBlip xmlns:asvg="http://schemas.microsoft.com/office/drawing/2016/SVG/main" r:embed="rId3"/>
-              </a:ext>
-            </a:extLst>
-          </a:blip>
-          <a:stretch>
-            <a:fillRect/>
-          </a:stretch>
-        </p:blipFill>
-        <p:spPr>
-          <a:xfrm>
-            <a:off x="6826827" y="1193197"/>
-            <a:ext cx="789709" cy="789709"/>
-          </a:xfrm>
-          <a:prstGeom prst="rect">
-            <a:avLst/>
-          </a:prstGeom>
-        </p:spPr>
-      </p:pic>
-    </p:spTree>
-  </p:cSld>
-  <p:clrMapOvr>
-    <a:masterClrMapping/>
-  </p:clrMapOvr>
-</p:sld>
-</file>
-
-<file path=ppt/slides/slide8.xml><?xml version="1.0" encoding="utf-8"?>
-<p:sld xmlns:a="http://schemas.openxmlformats.org/drawingml/2006/main" xmlns:r="http://schemas.openxmlformats.org/officeDocument/2006/relationships" xmlns:p="http://schemas.openxmlformats.org/presentationml/2006/main">
-  <p:cSld>
-    <p:spTree>
-      <p:nvGrpSpPr>
-        <p:cNvPr id="1" name=""/>
-        <p:cNvGrpSpPr/>
-        <p:nvPr/>
-      </p:nvGrpSpPr>
-      <p:grpSpPr>
-        <a:xfrm>
-          <a:off x="0" y="0"/>
-          <a:ext cx="0" cy="0"/>
-          <a:chOff x="0" y="0"/>
-          <a:chExt cx="0" cy="0"/>
-        </a:xfrm>
-      </p:grpSpPr>
-      <p:sp>
-        <p:nvSpPr>
-          <p:cNvPr id="2" name="Title 1"/>
-          <p:cNvSpPr>
-            <a:spLocks noGrp="1"/>
-          </p:cNvSpPr>
-          <p:nvPr>
-            <p:ph type="title"/>
-          </p:nvPr>
-        </p:nvSpPr>
-        <p:spPr/>
-        <p:txBody>
-          <a:bodyPr/>
-          <a:lstStyle/>
-          <a:p>
-            <a:r>
-              <a:rPr dirty="0">
-                <a:latin typeface="Bahnschrift" panose="020B0502040204020203" pitchFamily="34" charset="0"/>
-              </a:rPr>
-              <a:t>Proposed Solution</a:t>
-            </a:r>
-          </a:p>
-        </p:txBody>
-      </p:sp>
-      <p:sp>
-        <p:nvSpPr>
-          <p:cNvPr id="3" name="Content Placeholder 2"/>
-          <p:cNvSpPr>
-            <a:spLocks noGrp="1"/>
-          </p:cNvSpPr>
-          <p:nvPr>
-            <p:ph idx="1"/>
-          </p:nvPr>
-        </p:nvSpPr>
-        <p:spPr/>
-        <p:txBody>
-          <a:bodyPr>
-            <a:normAutofit fontScale="92500"/>
-          </a:bodyPr>
-          <a:lstStyle/>
-          <a:p>
-            <a:r>
-              <a:rPr lang="en-US" dirty="0">
-                <a:latin typeface="Bahnschrift SemiCondensed" panose="020B0502040204020203" pitchFamily="34" charset="0"/>
-              </a:rPr>
-              <a:t>1. </a:t>
-            </a:r>
-            <a:r>
-              <a:rPr lang="en-US" b="1" u="sng" dirty="0">
-                <a:latin typeface="Bahnschrift SemiCondensed" panose="020B0502040204020203" pitchFamily="34" charset="0"/>
-              </a:rPr>
-              <a:t>Data Acquisition</a:t>
-            </a:r>
-            <a:r>
-              <a:rPr lang="en-US" dirty="0">
-                <a:latin typeface="Bahnschrift SemiCondensed" panose="020B0502040204020203" pitchFamily="34" charset="0"/>
-              </a:rPr>
-              <a:t>: Collect granular energy consumption data from smart meters and individual appliances.</a:t>
-            </a:r>
-          </a:p>
-          <a:p>
-            <a:r>
-              <a:rPr lang="en-US" dirty="0">
-                <a:latin typeface="Bahnschrift SemiCondensed" panose="020B0502040204020203" pitchFamily="34" charset="0"/>
-              </a:rPr>
-              <a:t>2</a:t>
-            </a:r>
-            <a:r>
-              <a:rPr lang="en-US" b="1" u="sng" dirty="0">
-                <a:latin typeface="Bahnschrift SemiCondensed" panose="020B0502040204020203" pitchFamily="34" charset="0"/>
-              </a:rPr>
-              <a:t>. Data Preprocessing</a:t>
-            </a:r>
-            <a:r>
-              <a:rPr lang="en-US" dirty="0">
-                <a:latin typeface="Bahnschrift SemiCondensed" panose="020B0502040204020203" pitchFamily="34" charset="0"/>
-              </a:rPr>
-              <a:t>: Cleanse the dataset by addressing missing values and outliers, followed by normalization to scale features for model compatibility.</a:t>
-            </a:r>
-          </a:p>
-          <a:p>
-            <a:r>
-              <a:rPr lang="en-US" dirty="0">
-                <a:latin typeface="Bahnschrift SemiCondensed" panose="020B0502040204020203" pitchFamily="34" charset="0"/>
-              </a:rPr>
-              <a:t>3</a:t>
-            </a:r>
-            <a:r>
-              <a:rPr lang="en-US" b="1" u="sng" dirty="0">
-                <a:latin typeface="Bahnschrift SemiCondensed" panose="020B0502040204020203" pitchFamily="34" charset="0"/>
-              </a:rPr>
-              <a:t>. Feature Engineering</a:t>
-            </a:r>
-            <a:r>
-              <a:rPr lang="en-US" dirty="0">
-                <a:latin typeface="Bahnschrift SemiCondensed" panose="020B0502040204020203" pitchFamily="34" charset="0"/>
-              </a:rPr>
-              <a:t>: Enrich the dataset by integrating external variables such as meteorological data, temporal features (e.g., time of day, day of week), and user activity patterns.</a:t>
-            </a:r>
-            <a:endParaRPr dirty="0">
-              <a:latin typeface="Bahnschrift SemiCondensed" panose="020B0502040204020203" pitchFamily="34" charset="0"/>
-            </a:endParaRPr>
-          </a:p>
-        </p:txBody>
-      </p:sp>
-      <p:pic>
-        <p:nvPicPr>
-          <p:cNvPr id="5" name="Graphic 4" descr="Research with solid fill">
-            <a:extLst>
-              <a:ext uri="{FF2B5EF4-FFF2-40B4-BE49-F238E27FC236}">
-                <a16:creationId xmlns:a16="http://schemas.microsoft.com/office/drawing/2014/main" id="{4BFC9F9E-6C80-DFC2-6C4E-76EFB84236DB}"/>
-              </a:ext>
-            </a:extLst>
-          </p:cNvPr>
-          <p:cNvPicPr>
-            <a:picLocks noChangeAspect="1"/>
-          </p:cNvPicPr>
-          <p:nvPr/>
-        </p:nvPicPr>
-        <p:blipFill>
-          <a:blip r:embed="rId2">
-            <a:extLst>
-              <a:ext uri="{96DAC541-7B7A-43D3-8B79-37D633B846F1}">
-                <asvg:svgBlip xmlns:asvg="http://schemas.microsoft.com/office/drawing/2016/SVG/main" r:embed="rId3"/>
-              </a:ext>
-            </a:extLst>
-          </a:blip>
-          <a:stretch>
-            <a:fillRect/>
-          </a:stretch>
-        </p:blipFill>
-        <p:spPr>
-          <a:xfrm>
-            <a:off x="6598227" y="1110070"/>
-            <a:ext cx="914400" cy="914400"/>
-          </a:xfrm>
-          <a:prstGeom prst="rect">
-            <a:avLst/>
-          </a:prstGeom>
-        </p:spPr>
-      </p:pic>
-    </p:spTree>
-  </p:cSld>
-  <p:clrMapOvr>
-    <a:masterClrMapping/>
-  </p:clrMapOvr>
-</p:sld>
-</file>
-
-<file path=ppt/slides/slide9.xml><?xml version="1.0" encoding="utf-8"?>
-<p:sld xmlns:a="http://schemas.openxmlformats.org/drawingml/2006/main" xmlns:r="http://schemas.openxmlformats.org/officeDocument/2006/relationships" xmlns:p="http://schemas.openxmlformats.org/presentationml/2006/main">
-  <p:cSld>
-    <p:spTree>
-      <p:nvGrpSpPr>
-        <p:cNvPr id="1" name=""/>
-        <p:cNvGrpSpPr/>
-        <p:nvPr/>
-      </p:nvGrpSpPr>
-      <p:grpSpPr>
-        <a:xfrm>
-          <a:off x="0" y="0"/>
-          <a:ext cx="0" cy="0"/>
-          <a:chOff x="0" y="0"/>
-          <a:chExt cx="0" cy="0"/>
-        </a:xfrm>
-      </p:grpSpPr>
-      <p:sp>
-        <p:nvSpPr>
-          <p:cNvPr id="3" name="Content Placeholder 2">
-            <a:extLst>
-              <a:ext uri="{FF2B5EF4-FFF2-40B4-BE49-F238E27FC236}">
-                <a16:creationId xmlns:a16="http://schemas.microsoft.com/office/drawing/2014/main" id="{9B4689EC-2AFA-E963-CEED-61F7844D0B0D}"/>
-              </a:ext>
-            </a:extLst>
-          </p:cNvPr>
-          <p:cNvSpPr>
-            <a:spLocks noGrp="1"/>
-          </p:cNvSpPr>
-          <p:nvPr>
-            <p:ph idx="1"/>
-          </p:nvPr>
-        </p:nvSpPr>
-        <p:spPr>
-          <a:xfrm>
-            <a:off x="1070264" y="800101"/>
-            <a:ext cx="6905337" cy="5135032"/>
-          </a:xfrm>
-        </p:spPr>
-        <p:txBody>
-          <a:bodyPr/>
-          <a:lstStyle/>
-          <a:p>
-            <a:r>
-              <a:rPr lang="en-US" dirty="0">
-                <a:latin typeface="Bahnschrift SemiCondensed" panose="020B0502040204020203" pitchFamily="34" charset="0"/>
-              </a:rPr>
-              <a:t>4. </a:t>
-            </a:r>
-            <a:r>
-              <a:rPr lang="en-US" b="1" u="sng" dirty="0">
-                <a:latin typeface="Bahnschrift SemiCondensed" panose="020B0502040204020203" pitchFamily="34" charset="0"/>
-              </a:rPr>
-              <a:t>Predictive Modeling</a:t>
-            </a:r>
-            <a:r>
-              <a:rPr lang="en-US" dirty="0">
-                <a:latin typeface="Bahnschrift SemiCondensed" panose="020B0502040204020203" pitchFamily="34" charset="0"/>
-              </a:rPr>
-              <a:t>: Train and evaluate machine learning models, such as Random Forest and Long Short-Term Memory (LSTM) networks, to capture consumption patterns and dependencies.</a:t>
-            </a:r>
-          </a:p>
-          <a:p>
-            <a:r>
-              <a:rPr lang="en-US" dirty="0">
-                <a:latin typeface="Bahnschrift SemiCondensed" panose="020B0502040204020203" pitchFamily="34" charset="0"/>
-              </a:rPr>
-              <a:t>5. </a:t>
-            </a:r>
-            <a:r>
-              <a:rPr lang="en-US" b="1" u="sng" dirty="0">
-                <a:latin typeface="Bahnschrift SemiCondensed" panose="020B0502040204020203" pitchFamily="34" charset="0"/>
-              </a:rPr>
-              <a:t>Forecasting and Optimization</a:t>
-            </a:r>
-            <a:r>
-              <a:rPr lang="en-US" dirty="0">
-                <a:latin typeface="Bahnschrift SemiCondensed" panose="020B0502040204020203" pitchFamily="34" charset="0"/>
-              </a:rPr>
-              <a:t>: Generate daily energy usage predictions and provide actionable recommendations to improve energy efficiency and reduce costs.</a:t>
-            </a:r>
-          </a:p>
-          <a:p>
-            <a:r>
-              <a:rPr lang="en-US" dirty="0">
-                <a:latin typeface="Bahnschrift SemiCondensed" panose="020B0502040204020203" pitchFamily="34" charset="0"/>
-              </a:rPr>
-              <a:t>6</a:t>
-            </a:r>
-            <a:r>
-              <a:rPr lang="en-US" b="1" u="sng" dirty="0">
-                <a:latin typeface="Bahnschrift SemiCondensed" panose="020B0502040204020203" pitchFamily="34" charset="0"/>
-              </a:rPr>
-              <a:t>. Deployment and Monitoring</a:t>
-            </a:r>
-            <a:r>
-              <a:rPr lang="en-US" dirty="0">
-                <a:latin typeface="Bahnschrift SemiCondensed" panose="020B0502040204020203" pitchFamily="34" charset="0"/>
-              </a:rPr>
-              <a:t>: Deploy the finalized model into a live environment and continuously monitor its performance, retraining as necessary to adapt to new data and consumption patterns</a:t>
-            </a:r>
-            <a:r>
-              <a:rPr lang="en-US" dirty="0"/>
-              <a:t>.</a:t>
-            </a:r>
-            <a:endParaRPr lang="en-IN" dirty="0"/>
-          </a:p>
-        </p:txBody>
-      </p:sp>
-    </p:spTree>
-    <p:extLst>
-      <p:ext uri="{BB962C8B-B14F-4D97-AF65-F5344CB8AC3E}">
-        <p14:creationId xmlns:p14="http://schemas.microsoft.com/office/powerpoint/2010/main" val="4104507145"/>
       </p:ext>
     </p:extLst>
   </p:cSld>
